--- a/cloudflare-deploy/public/library/teacher/teacher-en.pptx
+++ b/cloudflare-deploy/public/library/teacher/teacher-en.pptx
@@ -38,6 +38,7 @@
     <p:sldId id="286" r:id="rId37"/>
     <p:sldId id="287" r:id="rId38"/>
     <p:sldId id="288" r:id="rId39"/>
+    <p:sldId id="289" r:id="rId40"/>
   </p:sldIdLst>
   <p:sldSz cx="12191695" cy="6858000" type="screen4x3"/>
   <p:notesSz cx="6858000" cy="9144000"/>
@@ -22233,6 +22234,1048 @@
 </file>
 
 <file path=ppt/slides/slide28.xml><?xml version="1.0" encoding="utf-8"?>
+<p:sld xmlns:a="http://schemas.openxmlformats.org/drawingml/2006/main" xmlns:p="http://schemas.openxmlformats.org/presentationml/2006/main" xmlns:r="http://schemas.openxmlformats.org/officeDocument/2006/relationships">
+  <p:cSld>
+    <p:bg>
+      <p:bgPr>
+        <a:solidFill>
+          <a:srgbClr val="FFFFFF"/>
+        </a:solidFill>
+        <a:effectLst/>
+      </p:bgPr>
+    </p:bg>
+    <p:spTree>
+      <p:nvGrpSpPr>
+        <p:cNvPr id="1" name=""/>
+        <p:cNvGrpSpPr/>
+        <p:nvPr/>
+      </p:nvGrpSpPr>
+      <p:grpSpPr/>
+      <p:sp>
+        <p:nvSpPr>
+          <p:cNvPr id="2" name="Rectangle 1"/>
+          <p:cNvSpPr/>
+          <p:nvPr/>
+        </p:nvSpPr>
+        <p:spPr>
+          <a:xfrm>
+            <a:off x="0" y="0"/>
+            <a:ext cx="12191695" cy="566928"/>
+          </a:xfrm>
+          <a:prstGeom prst="rect">
+            <a:avLst/>
+          </a:prstGeom>
+          <a:solidFill>
+            <a:srgbClr val="EA580C"/>
+          </a:solidFill>
+          <a:ln>
+            <a:noFill/>
+          </a:ln>
+          <a:effectLst/>
+        </p:spPr>
+        <p:style>
+          <a:lnRef idx="1">
+            <a:schemeClr val="accent1"/>
+          </a:lnRef>
+          <a:fillRef idx="3">
+            <a:schemeClr val="accent1"/>
+          </a:fillRef>
+          <a:effectRef idx="2">
+            <a:schemeClr val="accent1"/>
+          </a:effectRef>
+          <a:fontRef idx="minor">
+            <a:schemeClr val="lt1"/>
+          </a:fontRef>
+        </p:style>
+        <p:txBody>
+          <a:bodyPr rtlCol="0" anchor="ctr"/>
+          <a:lstStyle/>
+          <a:p>
+            <a:pPr algn="ctr"/>
+          </a:p>
+        </p:txBody>
+      </p:sp>
+      <p:sp>
+        <p:nvSpPr>
+          <p:cNvPr id="3" name="Rectangle 2"/>
+          <p:cNvSpPr/>
+          <p:nvPr/>
+        </p:nvSpPr>
+        <p:spPr>
+          <a:xfrm>
+            <a:off x="0" y="566928"/>
+            <a:ext cx="12191695" cy="54864"/>
+          </a:xfrm>
+          <a:prstGeom prst="rect">
+            <a:avLst/>
+          </a:prstGeom>
+          <a:solidFill>
+            <a:srgbClr val="FFB020"/>
+          </a:solidFill>
+          <a:ln>
+            <a:noFill/>
+          </a:ln>
+          <a:effectLst/>
+        </p:spPr>
+        <p:style>
+          <a:lnRef idx="1">
+            <a:schemeClr val="accent1"/>
+          </a:lnRef>
+          <a:fillRef idx="3">
+            <a:schemeClr val="accent1"/>
+          </a:fillRef>
+          <a:effectRef idx="2">
+            <a:schemeClr val="accent1"/>
+          </a:effectRef>
+          <a:fontRef idx="minor">
+            <a:schemeClr val="lt1"/>
+          </a:fontRef>
+        </p:style>
+        <p:txBody>
+          <a:bodyPr rtlCol="0" anchor="ctr"/>
+          <a:lstStyle/>
+          <a:p>
+            <a:pPr algn="ctr"/>
+          </a:p>
+        </p:txBody>
+      </p:sp>
+      <p:sp>
+        <p:nvSpPr>
+          <p:cNvPr id="4" name="TextBox 3"/>
+          <p:cNvSpPr txBox="1"/>
+          <p:nvPr/>
+        </p:nvSpPr>
+        <p:spPr>
+          <a:xfrm>
+            <a:off x="365760" y="27432"/>
+            <a:ext cx="7315200" cy="502920"/>
+          </a:xfrm>
+          <a:prstGeom prst="rect">
+            <a:avLst/>
+          </a:prstGeom>
+          <a:noFill/>
+        </p:spPr>
+        <p:txBody>
+          <a:bodyPr wrap="square" anchor="ctr">
+            <a:spAutoFit/>
+          </a:bodyPr>
+          <a:lstStyle/>
+          <a:p>
+            <a:pPr algn="l">
+              <a:lnSpc>
+                <a:spcPct val="100000"/>
+              </a:lnSpc>
+            </a:pPr>
+            <a:r>
+              <a:rPr sz="1500" b="1">
+                <a:solidFill>
+                  <a:srgbClr val="FFFFFF"/>
+                </a:solidFill>
+                <a:latin typeface="Malgun Gothic"/>
+              </a:rPr>
+              <a:t>👩‍🏫 Mangoi Teacher User Guide</a:t>
+            </a:r>
+          </a:p>
+        </p:txBody>
+      </p:sp>
+      <p:sp>
+        <p:nvSpPr>
+          <p:cNvPr id="5" name="TextBox 4"/>
+          <p:cNvSpPr txBox="1"/>
+          <p:nvPr/>
+        </p:nvSpPr>
+        <p:spPr>
+          <a:xfrm>
+            <a:off x="8168335" y="27432"/>
+            <a:ext cx="3657600" cy="502920"/>
+          </a:xfrm>
+          <a:prstGeom prst="rect">
+            <a:avLst/>
+          </a:prstGeom>
+          <a:noFill/>
+        </p:spPr>
+        <p:txBody>
+          <a:bodyPr wrap="square" anchor="ctr">
+            <a:spAutoFit/>
+          </a:bodyPr>
+          <a:lstStyle/>
+          <a:p>
+            <a:pPr algn="r">
+              <a:lnSpc>
+                <a:spcPct val="100000"/>
+              </a:lnSpc>
+            </a:pPr>
+            <a:r>
+              <a:rPr sz="1300" b="1">
+                <a:solidFill>
+                  <a:srgbClr val="F1F5F9"/>
+                </a:solidFill>
+                <a:latin typeface="Malgun Gothic"/>
+              </a:rPr>
+              <a:t>How to Use the Main Features</a:t>
+            </a:r>
+          </a:p>
+        </p:txBody>
+      </p:sp>
+      <p:sp>
+        <p:nvSpPr>
+          <p:cNvPr id="6" name="Rounded Rectangle 5"/>
+          <p:cNvSpPr/>
+          <p:nvPr/>
+        </p:nvSpPr>
+        <p:spPr>
+          <a:xfrm>
+            <a:off x="365760" y="822960"/>
+            <a:ext cx="868680" cy="868680"/>
+          </a:xfrm>
+          <a:prstGeom prst="roundRect">
+            <a:avLst/>
+          </a:prstGeom>
+          <a:solidFill>
+            <a:srgbClr val="EA580C"/>
+          </a:solidFill>
+          <a:ln>
+            <a:noFill/>
+          </a:ln>
+          <a:effectLst/>
+        </p:spPr>
+        <p:style>
+          <a:lnRef idx="1">
+            <a:schemeClr val="accent1"/>
+          </a:lnRef>
+          <a:fillRef idx="3">
+            <a:schemeClr val="accent1"/>
+          </a:fillRef>
+          <a:effectRef idx="2">
+            <a:schemeClr val="accent1"/>
+          </a:effectRef>
+          <a:fontRef idx="minor">
+            <a:schemeClr val="lt1"/>
+          </a:fontRef>
+        </p:style>
+        <p:txBody>
+          <a:bodyPr rtlCol="0" anchor="ctr"/>
+          <a:lstStyle/>
+          <a:p>
+            <a:pPr algn="ctr"/>
+          </a:p>
+        </p:txBody>
+      </p:sp>
+      <p:sp>
+        <p:nvSpPr>
+          <p:cNvPr id="7" name="TextBox 6"/>
+          <p:cNvSpPr txBox="1"/>
+          <p:nvPr/>
+        </p:nvSpPr>
+        <p:spPr>
+          <a:xfrm>
+            <a:off x="365760" y="822960"/>
+            <a:ext cx="868680" cy="868680"/>
+          </a:xfrm>
+          <a:prstGeom prst="rect">
+            <a:avLst/>
+          </a:prstGeom>
+          <a:noFill/>
+        </p:spPr>
+        <p:txBody>
+          <a:bodyPr wrap="square" anchor="ctr">
+            <a:spAutoFit/>
+          </a:bodyPr>
+          <a:lstStyle/>
+          <a:p>
+            <a:pPr algn="ctr">
+              <a:lnSpc>
+                <a:spcPct val="100000"/>
+              </a:lnSpc>
+            </a:pPr>
+            <a:r>
+              <a:rPr sz="2600" b="1">
+                <a:solidFill>
+                  <a:srgbClr val="FFFFFF"/>
+                </a:solidFill>
+                <a:latin typeface="Malgun Gothic"/>
+              </a:rPr>
+              <a:t>26</a:t>
+            </a:r>
+          </a:p>
+        </p:txBody>
+      </p:sp>
+      <p:sp>
+        <p:nvSpPr>
+          <p:cNvPr id="8" name="TextBox 7"/>
+          <p:cNvSpPr txBox="1"/>
+          <p:nvPr/>
+        </p:nvSpPr>
+        <p:spPr>
+          <a:xfrm>
+            <a:off x="1371600" y="822960"/>
+            <a:ext cx="10424160" cy="502920"/>
+          </a:xfrm>
+          <a:prstGeom prst="rect">
+            <a:avLst/>
+          </a:prstGeom>
+          <a:noFill/>
+        </p:spPr>
+        <p:txBody>
+          <a:bodyPr wrap="square" anchor="t">
+            <a:spAutoFit/>
+          </a:bodyPr>
+          <a:lstStyle/>
+          <a:p>
+            <a:pPr algn="l">
+              <a:lnSpc>
+                <a:spcPct val="100000"/>
+              </a:lnSpc>
+            </a:pPr>
+            <a:r>
+              <a:rPr sz="2300" b="1">
+                <a:solidFill>
+                  <a:srgbClr val="1E2340"/>
+                </a:solidFill>
+                <a:latin typeface="Malgun Gothic"/>
+              </a:rPr>
+              <a:t>🤖 AI Coaching After Class</a:t>
+            </a:r>
+          </a:p>
+        </p:txBody>
+      </p:sp>
+      <p:sp>
+        <p:nvSpPr>
+          <p:cNvPr id="9" name="TextBox 8"/>
+          <p:cNvSpPr txBox="1"/>
+          <p:nvPr/>
+        </p:nvSpPr>
+        <p:spPr>
+          <a:xfrm>
+            <a:off x="1417320" y="1353312"/>
+            <a:ext cx="10424160" cy="320040"/>
+          </a:xfrm>
+          <a:prstGeom prst="rect">
+            <a:avLst/>
+          </a:prstGeom>
+          <a:noFill/>
+        </p:spPr>
+        <p:txBody>
+          <a:bodyPr wrap="square" anchor="t">
+            <a:spAutoFit/>
+          </a:bodyPr>
+          <a:lstStyle/>
+          <a:p>
+            <a:pPr algn="l">
+              <a:lnSpc>
+                <a:spcPct val="100000"/>
+              </a:lnSpc>
+            </a:pPr>
+            <a:r>
+              <a:rPr sz="1300" b="0">
+                <a:solidFill>
+                  <a:srgbClr val="64748B"/>
+                </a:solidFill>
+                <a:latin typeface="Malgun Gothic"/>
+              </a:rPr>
+              <a:t>Strengths · areas to improve · one action for today</a:t>
+            </a:r>
+          </a:p>
+        </p:txBody>
+      </p:sp>
+      <p:sp>
+        <p:nvSpPr>
+          <p:cNvPr id="10" name="Rounded Rectangle 9"/>
+          <p:cNvSpPr/>
+          <p:nvPr/>
+        </p:nvSpPr>
+        <p:spPr>
+          <a:xfrm>
+            <a:off x="365760" y="1828800"/>
+            <a:ext cx="11430000" cy="777240"/>
+          </a:xfrm>
+          <a:prstGeom prst="roundRect">
+            <a:avLst/>
+          </a:prstGeom>
+          <a:solidFill>
+            <a:srgbClr val="FFF4E6"/>
+          </a:solidFill>
+          <a:ln>
+            <a:noFill/>
+          </a:ln>
+          <a:effectLst/>
+        </p:spPr>
+        <p:style>
+          <a:lnRef idx="1">
+            <a:schemeClr val="accent1"/>
+          </a:lnRef>
+          <a:fillRef idx="3">
+            <a:schemeClr val="accent1"/>
+          </a:fillRef>
+          <a:effectRef idx="2">
+            <a:schemeClr val="accent1"/>
+          </a:effectRef>
+          <a:fontRef idx="minor">
+            <a:schemeClr val="lt1"/>
+          </a:fontRef>
+        </p:style>
+        <p:txBody>
+          <a:bodyPr rtlCol="0" anchor="ctr"/>
+          <a:lstStyle/>
+          <a:p>
+            <a:pPr algn="ctr"/>
+          </a:p>
+        </p:txBody>
+      </p:sp>
+      <p:sp>
+        <p:nvSpPr>
+          <p:cNvPr id="11" name="TextBox 10"/>
+          <p:cNvSpPr txBox="1"/>
+          <p:nvPr/>
+        </p:nvSpPr>
+        <p:spPr>
+          <a:xfrm>
+            <a:off x="548640" y="1901952"/>
+            <a:ext cx="11064240" cy="640080"/>
+          </a:xfrm>
+          <a:prstGeom prst="rect">
+            <a:avLst/>
+          </a:prstGeom>
+          <a:noFill/>
+        </p:spPr>
+        <p:txBody>
+          <a:bodyPr wrap="square" anchor="t">
+            <a:spAutoFit/>
+          </a:bodyPr>
+          <a:lstStyle/>
+          <a:p>
+            <a:pPr algn="l">
+              <a:lnSpc>
+                <a:spcPct val="115000"/>
+              </a:lnSpc>
+            </a:pPr>
+            <a:r>
+              <a:rPr sz="1200" b="0">
+                <a:solidFill>
+                  <a:srgbClr val="334155"/>
+                </a:solidFill>
+                <a:latin typeface="Malgun Gothic"/>
+              </a:rPr>
+              <a:t>When you finish and leave a class, the AI analyzes it and shows a coaching card with ‘What you did well / Areas to improve / One action for today’ in both Korean and English. Based on real class signals — talk ratio, engagement, praise count — it helps in a warm coaching tone, not surveillance.</a:t>
+            </a:r>
+          </a:p>
+        </p:txBody>
+      </p:sp>
+      <p:sp>
+        <p:nvSpPr>
+          <p:cNvPr id="12" name="TextBox 11"/>
+          <p:cNvSpPr txBox="1"/>
+          <p:nvPr/>
+        </p:nvSpPr>
+        <p:spPr>
+          <a:xfrm>
+            <a:off x="457200" y="2743200"/>
+            <a:ext cx="5669280" cy="320040"/>
+          </a:xfrm>
+          <a:prstGeom prst="rect">
+            <a:avLst/>
+          </a:prstGeom>
+          <a:noFill/>
+        </p:spPr>
+        <p:txBody>
+          <a:bodyPr wrap="square" anchor="t">
+            <a:spAutoFit/>
+          </a:bodyPr>
+          <a:lstStyle/>
+          <a:p>
+            <a:pPr algn="l">
+              <a:lnSpc>
+                <a:spcPct val="100000"/>
+              </a:lnSpc>
+            </a:pPr>
+            <a:r>
+              <a:rPr sz="1350" b="1">
+                <a:solidFill>
+                  <a:srgbClr val="EA580C"/>
+                </a:solidFill>
+                <a:latin typeface="Malgun Gothic"/>
+              </a:rPr>
+              <a:t>How to use</a:t>
+            </a:r>
+          </a:p>
+        </p:txBody>
+      </p:sp>
+      <p:sp>
+        <p:nvSpPr>
+          <p:cNvPr id="13" name="TextBox 12"/>
+          <p:cNvSpPr txBox="1"/>
+          <p:nvPr/>
+        </p:nvSpPr>
+        <p:spPr>
+          <a:xfrm>
+            <a:off x="457200" y="3108960"/>
+            <a:ext cx="5669280" cy="2377440"/>
+          </a:xfrm>
+          <a:prstGeom prst="rect">
+            <a:avLst/>
+          </a:prstGeom>
+          <a:noFill/>
+        </p:spPr>
+        <p:txBody>
+          <a:bodyPr wrap="square">
+            <a:spAutoFit/>
+          </a:bodyPr>
+          <a:lstStyle/>
+          <a:p>
+            <a:pPr>
+              <a:lnSpc>
+                <a:spcPct val="115000"/>
+              </a:lnSpc>
+              <a:spcAft>
+                <a:spcPts val="600"/>
+              </a:spcAft>
+            </a:pPr>
+            <a:r>
+              <a:rPr sz="1050" b="1">
+                <a:solidFill>
+                  <a:srgbClr val="EA580C"/>
+                </a:solidFill>
+                <a:latin typeface="Malgun Gothic"/>
+              </a:rPr>
+              <a:t>● </a:t>
+            </a:r>
+            <a:r>
+              <a:rPr sz="1250">
+                <a:solidFill>
+                  <a:srgbClr val="334155"/>
+                </a:solidFill>
+                <a:latin typeface="Malgun Gothic"/>
+              </a:rPr>
+              <a:t>End the video class with ‘Leave’ and the coaching card appears automatically.</a:t>
+            </a:r>
+          </a:p>
+          <a:p>
+            <a:pPr>
+              <a:lnSpc>
+                <a:spcPct val="115000"/>
+              </a:lnSpc>
+              <a:spcAft>
+                <a:spcPts val="600"/>
+              </a:spcAft>
+            </a:pPr>
+            <a:r>
+              <a:rPr sz="1050" b="1">
+                <a:solidFill>
+                  <a:srgbClr val="EA580C"/>
+                </a:solidFill>
+                <a:latin typeface="Malgun Gothic"/>
+              </a:rPr>
+              <a:t>● </a:t>
+            </a:r>
+            <a:r>
+              <a:rPr sz="1250">
+                <a:solidFill>
+                  <a:srgbClr val="334155"/>
+                </a:solidFill>
+                <a:latin typeface="Malgun Gothic"/>
+              </a:rPr>
+              <a:t>Toggle 🇰🇷 Korean / 🇺🇸 English to read it in the language you prefer.</a:t>
+            </a:r>
+          </a:p>
+          <a:p>
+            <a:pPr>
+              <a:lnSpc>
+                <a:spcPct val="115000"/>
+              </a:lnSpc>
+              <a:spcAft>
+                <a:spcPts val="600"/>
+              </a:spcAft>
+            </a:pPr>
+            <a:r>
+              <a:rPr sz="1050" b="1">
+                <a:solidFill>
+                  <a:srgbClr val="EA580C"/>
+                </a:solidFill>
+                <a:latin typeface="Malgun Gothic"/>
+              </a:rPr>
+              <a:t>● </a:t>
+            </a:r>
+            <a:r>
+              <a:rPr sz="1250">
+                <a:solidFill>
+                  <a:srgbClr val="334155"/>
+                </a:solidFill>
+                <a:latin typeface="Malgun Gothic"/>
+              </a:rPr>
+              <a:t>Check the engagement · talk-ratio · praise-count summary and the strengths · improvements · one action.</a:t>
+            </a:r>
+          </a:p>
+          <a:p>
+            <a:pPr>
+              <a:lnSpc>
+                <a:spcPct val="115000"/>
+              </a:lnSpc>
+              <a:spcAft>
+                <a:spcPts val="600"/>
+              </a:spcAft>
+            </a:pPr>
+            <a:r>
+              <a:rPr sz="1050" b="1">
+                <a:solidFill>
+                  <a:srgbClr val="EA580C"/>
+                </a:solidFill>
+                <a:latin typeface="Malgun Gothic"/>
+              </a:rPr>
+              <a:t>● </a:t>
+            </a:r>
+            <a:r>
+              <a:rPr sz="1250">
+                <a:solidFill>
+                  <a:srgbClr val="334155"/>
+                </a:solidFill>
+                <a:latin typeface="Malgun Gothic"/>
+              </a:rPr>
+              <a:t>Press ‘Full report’ to see class details plus recent coaching history (quality score · summary).</a:t>
+            </a:r>
+          </a:p>
+        </p:txBody>
+      </p:sp>
+      <p:sp>
+        <p:nvSpPr>
+          <p:cNvPr id="14" name="Rounded Rectangle 13"/>
+          <p:cNvSpPr/>
+          <p:nvPr/>
+        </p:nvSpPr>
+        <p:spPr>
+          <a:xfrm>
+            <a:off x="457200" y="4782312"/>
+            <a:ext cx="5669280" cy="1316736"/>
+          </a:xfrm>
+          <a:prstGeom prst="roundRect">
+            <a:avLst/>
+          </a:prstGeom>
+          <a:solidFill>
+            <a:srgbClr val="F4F7FF"/>
+          </a:solidFill>
+          <a:ln w="12700">
+            <a:solidFill>
+              <a:srgbClr val="EA580C"/>
+            </a:solidFill>
+          </a:ln>
+          <a:effectLst/>
+        </p:spPr>
+        <p:style>
+          <a:lnRef idx="1">
+            <a:schemeClr val="accent1"/>
+          </a:lnRef>
+          <a:fillRef idx="3">
+            <a:schemeClr val="accent1"/>
+          </a:fillRef>
+          <a:effectRef idx="2">
+            <a:schemeClr val="accent1"/>
+          </a:effectRef>
+          <a:fontRef idx="minor">
+            <a:schemeClr val="lt1"/>
+          </a:fontRef>
+        </p:style>
+        <p:txBody>
+          <a:bodyPr rtlCol="0" anchor="ctr"/>
+          <a:lstStyle/>
+          <a:p>
+            <a:pPr algn="ctr"/>
+          </a:p>
+        </p:txBody>
+      </p:sp>
+      <p:sp>
+        <p:nvSpPr>
+          <p:cNvPr id="15" name="TextBox 14"/>
+          <p:cNvSpPr txBox="1"/>
+          <p:nvPr/>
+        </p:nvSpPr>
+        <p:spPr>
+          <a:xfrm>
+            <a:off x="594360" y="4837175"/>
+            <a:ext cx="5394960" cy="274320"/>
+          </a:xfrm>
+          <a:prstGeom prst="rect">
+            <a:avLst/>
+          </a:prstGeom>
+          <a:noFill/>
+        </p:spPr>
+        <p:txBody>
+          <a:bodyPr wrap="square" anchor="t">
+            <a:spAutoFit/>
+          </a:bodyPr>
+          <a:lstStyle/>
+          <a:p>
+            <a:pPr algn="l">
+              <a:lnSpc>
+                <a:spcPct val="100000"/>
+              </a:lnSpc>
+            </a:pPr>
+            <a:r>
+              <a:rPr sz="1150" b="1">
+                <a:solidFill>
+                  <a:srgbClr val="EA580C"/>
+                </a:solidFill>
+                <a:latin typeface="Malgun Gothic"/>
+              </a:rPr>
+              <a:t>✅ Key Points</a:t>
+            </a:r>
+          </a:p>
+        </p:txBody>
+      </p:sp>
+      <p:sp>
+        <p:nvSpPr>
+          <p:cNvPr id="16" name="TextBox 15"/>
+          <p:cNvSpPr txBox="1"/>
+          <p:nvPr/>
+        </p:nvSpPr>
+        <p:spPr>
+          <a:xfrm>
+            <a:off x="594360" y="5111496"/>
+            <a:ext cx="5394960" cy="950976"/>
+          </a:xfrm>
+          <a:prstGeom prst="rect">
+            <a:avLst/>
+          </a:prstGeom>
+          <a:noFill/>
+        </p:spPr>
+        <p:txBody>
+          <a:bodyPr wrap="square">
+            <a:spAutoFit/>
+          </a:bodyPr>
+          <a:lstStyle/>
+          <a:p>
+            <a:pPr>
+              <a:lnSpc>
+                <a:spcPct val="115000"/>
+              </a:lnSpc>
+              <a:spcAft>
+                <a:spcPts val="200"/>
+              </a:spcAft>
+            </a:pPr>
+            <a:r>
+              <a:rPr sz="900" b="1">
+                <a:solidFill>
+                  <a:srgbClr val="EA580C"/>
+                </a:solidFill>
+                <a:latin typeface="Malgun Gothic"/>
+              </a:rPr>
+              <a:t>● </a:t>
+            </a:r>
+            <a:r>
+              <a:rPr sz="1100">
+                <a:solidFill>
+                  <a:srgbClr val="334155"/>
+                </a:solidFill>
+                <a:latin typeface="Malgun Gothic"/>
+              </a:rPr>
+              <a:t>English is the default for native-speaker teachers, with Korean provided alongside.</a:t>
+            </a:r>
+          </a:p>
+          <a:p>
+            <a:pPr>
+              <a:lnSpc>
+                <a:spcPct val="115000"/>
+              </a:lnSpc>
+              <a:spcAft>
+                <a:spcPts val="200"/>
+              </a:spcAft>
+            </a:pPr>
+            <a:r>
+              <a:rPr sz="900" b="1">
+                <a:solidFill>
+                  <a:srgbClr val="EA580C"/>
+                </a:solidFill>
+                <a:latin typeface="Malgun Gothic"/>
+              </a:rPr>
+              <a:t>● </a:t>
+            </a:r>
+            <a:r>
+              <a:rPr sz="1100">
+                <a:solidFill>
+                  <a:srgbClr val="334155"/>
+                </a:solidFill>
+                <a:latin typeface="Malgun Gothic"/>
+              </a:rPr>
+              <a:t>A class-quality score (0–100) and a detailed summary help you find your own growth points.</a:t>
+            </a:r>
+          </a:p>
+          <a:p>
+            <a:pPr>
+              <a:lnSpc>
+                <a:spcPct val="115000"/>
+              </a:lnSpc>
+              <a:spcAft>
+                <a:spcPts val="200"/>
+              </a:spcAft>
+            </a:pPr>
+            <a:r>
+              <a:rPr sz="900" b="1">
+                <a:solidFill>
+                  <a:srgbClr val="EA580C"/>
+                </a:solidFill>
+                <a:latin typeface="Malgun Gothic"/>
+              </a:rPr>
+              <a:t>● </a:t>
+            </a:r>
+            <a:r>
+              <a:rPr sz="1100">
+                <a:solidFill>
+                  <a:srgbClr val="334155"/>
+                </a:solidFill>
+                <a:latin typeface="Malgun Gothic"/>
+              </a:rPr>
+              <a:t>Even if the AI is briefly slow, baseline coaching in both languages is always provided.</a:t>
+            </a:r>
+          </a:p>
+        </p:txBody>
+      </p:sp>
+      <p:sp>
+        <p:nvSpPr>
+          <p:cNvPr id="17" name="Rounded Rectangle 16"/>
+          <p:cNvSpPr/>
+          <p:nvPr/>
+        </p:nvSpPr>
+        <p:spPr>
+          <a:xfrm>
+            <a:off x="457200" y="6208775"/>
+            <a:ext cx="5669280" cy="640080"/>
+          </a:xfrm>
+          <a:prstGeom prst="roundRect">
+            <a:avLst/>
+          </a:prstGeom>
+          <a:solidFill>
+            <a:srgbClr val="FFFBEB"/>
+          </a:solidFill>
+          <a:ln w="12700">
+            <a:solidFill>
+              <a:srgbClr val="F59E0B"/>
+            </a:solidFill>
+          </a:ln>
+          <a:effectLst/>
+        </p:spPr>
+        <p:style>
+          <a:lnRef idx="1">
+            <a:schemeClr val="accent1"/>
+          </a:lnRef>
+          <a:fillRef idx="3">
+            <a:schemeClr val="accent1"/>
+          </a:fillRef>
+          <a:effectRef idx="2">
+            <a:schemeClr val="accent1"/>
+          </a:effectRef>
+          <a:fontRef idx="minor">
+            <a:schemeClr val="lt1"/>
+          </a:fontRef>
+        </p:style>
+        <p:txBody>
+          <a:bodyPr rtlCol="0" anchor="ctr"/>
+          <a:lstStyle/>
+          <a:p>
+            <a:pPr algn="ctr"/>
+          </a:p>
+        </p:txBody>
+      </p:sp>
+      <p:sp>
+        <p:nvSpPr>
+          <p:cNvPr id="18" name="TextBox 17"/>
+          <p:cNvSpPr txBox="1"/>
+          <p:nvPr/>
+        </p:nvSpPr>
+        <p:spPr>
+          <a:xfrm>
+            <a:off x="594360" y="6254495"/>
+            <a:ext cx="5394960" cy="548640"/>
+          </a:xfrm>
+          <a:prstGeom prst="rect">
+            <a:avLst/>
+          </a:prstGeom>
+          <a:noFill/>
+        </p:spPr>
+        <p:txBody>
+          <a:bodyPr wrap="square" anchor="t">
+            <a:spAutoFit/>
+          </a:bodyPr>
+          <a:lstStyle/>
+          <a:p>
+            <a:pPr algn="l">
+              <a:lnSpc>
+                <a:spcPct val="105000"/>
+              </a:lnSpc>
+            </a:pPr>
+            <a:r>
+              <a:rPr sz="1050" b="0">
+                <a:solidFill>
+                  <a:srgbClr val="92670A"/>
+                </a:solidFill>
+                <a:latin typeface="Malgun Gothic"/>
+              </a:rPr>
+              <a:t>⚠️ Good to know · Coaching is meant to support your own growth. Admins only receive a monthly rollup.</a:t>
+            </a:r>
+          </a:p>
+        </p:txBody>
+      </p:sp>
+      <p:sp>
+        <p:nvSpPr>
+          <p:cNvPr id="19" name="Rounded Rectangle 18"/>
+          <p:cNvSpPr/>
+          <p:nvPr/>
+        </p:nvSpPr>
+        <p:spPr>
+          <a:xfrm>
+            <a:off x="457200" y="6940295"/>
+            <a:ext cx="5669280" cy="658368"/>
+          </a:xfrm>
+          <a:prstGeom prst="roundRect">
+            <a:avLst/>
+          </a:prstGeom>
+          <a:solidFill>
+            <a:srgbClr val="FFF7E6"/>
+          </a:solidFill>
+          <a:ln w="12700">
+            <a:solidFill>
+              <a:srgbClr val="FFB020"/>
+            </a:solidFill>
+          </a:ln>
+          <a:effectLst/>
+        </p:spPr>
+        <p:style>
+          <a:lnRef idx="1">
+            <a:schemeClr val="accent1"/>
+          </a:lnRef>
+          <a:fillRef idx="3">
+            <a:schemeClr val="accent1"/>
+          </a:fillRef>
+          <a:effectRef idx="2">
+            <a:schemeClr val="accent1"/>
+          </a:effectRef>
+          <a:fontRef idx="minor">
+            <a:schemeClr val="lt1"/>
+          </a:fontRef>
+        </p:style>
+        <p:txBody>
+          <a:bodyPr rtlCol="0" anchor="ctr"/>
+          <a:lstStyle/>
+          <a:p>
+            <a:pPr algn="ctr"/>
+          </a:p>
+        </p:txBody>
+      </p:sp>
+      <p:sp>
+        <p:nvSpPr>
+          <p:cNvPr id="20" name="TextBox 19"/>
+          <p:cNvSpPr txBox="1"/>
+          <p:nvPr/>
+        </p:nvSpPr>
+        <p:spPr>
+          <a:xfrm>
+            <a:off x="594360" y="6986015"/>
+            <a:ext cx="5394960" cy="566928"/>
+          </a:xfrm>
+          <a:prstGeom prst="rect">
+            <a:avLst/>
+          </a:prstGeom>
+          <a:noFill/>
+        </p:spPr>
+        <p:txBody>
+          <a:bodyPr wrap="square" anchor="t">
+            <a:spAutoFit/>
+          </a:bodyPr>
+          <a:lstStyle/>
+          <a:p>
+            <a:pPr algn="l">
+              <a:lnSpc>
+                <a:spcPct val="105000"/>
+              </a:lnSpc>
+            </a:pPr>
+            <a:r>
+              <a:rPr sz="1050" b="0">
+                <a:solidFill>
+                  <a:srgbClr val="5B4A2A"/>
+                </a:solidFill>
+                <a:latin typeface="Malgun Gothic"/>
+              </a:rPr>
+              <a:t>💡 Tip · Trying just the ‘one action for today’ in your next class visibly improves how you draw out student speech.</a:t>
+            </a:r>
+          </a:p>
+        </p:txBody>
+      </p:sp>
+      <p:sp>
+        <p:nvSpPr>
+          <p:cNvPr id="21" name="Rectangle 20"/>
+          <p:cNvSpPr/>
+          <p:nvPr/>
+        </p:nvSpPr>
+        <p:spPr>
+          <a:xfrm>
+            <a:off x="6300216" y="2345436"/>
+            <a:ext cx="5596128" cy="3538728"/>
+          </a:xfrm>
+          <a:prstGeom prst="rect">
+            <a:avLst/>
+          </a:prstGeom>
+          <a:solidFill>
+            <a:srgbClr val="FFFFFF"/>
+          </a:solidFill>
+          <a:ln w="12700">
+            <a:solidFill>
+              <a:srgbClr val="E2E8F0"/>
+            </a:solidFill>
+          </a:ln>
+          <a:effectLst/>
+        </p:spPr>
+        <p:style>
+          <a:lnRef idx="1">
+            <a:schemeClr val="accent1"/>
+          </a:lnRef>
+          <a:fillRef idx="3">
+            <a:schemeClr val="accent1"/>
+          </a:fillRef>
+          <a:effectRef idx="2">
+            <a:schemeClr val="accent1"/>
+          </a:effectRef>
+          <a:fontRef idx="minor">
+            <a:schemeClr val="lt1"/>
+          </a:fontRef>
+        </p:style>
+        <p:txBody>
+          <a:bodyPr rtlCol="0" anchor="ctr"/>
+          <a:lstStyle/>
+          <a:p>
+            <a:pPr algn="ctr"/>
+          </a:p>
+        </p:txBody>
+      </p:sp>
+      <p:pic>
+        <p:nvPicPr>
+          <p:cNvPr id="22" name="Picture 21" descr="teacher_aicoach.jpg"/>
+          <p:cNvPicPr>
+            <a:picLocks noChangeAspect="1"/>
+          </p:cNvPicPr>
+          <p:nvPr/>
+        </p:nvPicPr>
+        <p:blipFill>
+          <a:blip r:embed="rId2"/>
+          <a:stretch>
+            <a:fillRect/>
+          </a:stretch>
+        </p:blipFill>
+        <p:spPr>
+          <a:xfrm>
+            <a:off x="6355080" y="2400300"/>
+            <a:ext cx="5486400" cy="3429000"/>
+          </a:xfrm>
+          <a:prstGeom prst="rect">
+            <a:avLst/>
+          </a:prstGeom>
+        </p:spPr>
+      </p:pic>
+    </p:spTree>
+  </p:cSld>
+  <p:clrMapOvr>
+    <a:masterClrMapping/>
+  </p:clrMapOvr>
+</p:sld>
+</file>
+
+<file path=ppt/slides/slide29.xml><?xml version="1.0" encoding="utf-8"?>
 <p:sld xmlns:a="http://schemas.openxmlformats.org/drawingml/2006/main" xmlns:p="http://schemas.openxmlformats.org/presentationml/2006/main" xmlns:r="http://schemas.openxmlformats.org/officeDocument/2006/relationships">
   <p:cSld>
     <p:bg>
@@ -23431,351 +24474,6 @@
 </p:sld>
 </file>
 
-<file path=ppt/slides/slide29.xml><?xml version="1.0" encoding="utf-8"?>
-<p:sld xmlns:a="http://schemas.openxmlformats.org/drawingml/2006/main" xmlns:p="http://schemas.openxmlformats.org/presentationml/2006/main" xmlns:r="http://schemas.openxmlformats.org/officeDocument/2006/relationships">
-  <p:cSld>
-    <p:bg>
-      <p:bgPr>
-        <a:solidFill>
-          <a:srgbClr val="FFFFFF"/>
-        </a:solidFill>
-        <a:effectLst/>
-      </p:bgPr>
-    </p:bg>
-    <p:spTree>
-      <p:nvGrpSpPr>
-        <p:cNvPr id="1" name=""/>
-        <p:cNvGrpSpPr/>
-        <p:nvPr/>
-      </p:nvGrpSpPr>
-      <p:grpSpPr/>
-      <p:sp>
-        <p:nvSpPr>
-          <p:cNvPr id="2" name="Rectangle 1"/>
-          <p:cNvSpPr/>
-          <p:nvPr/>
-        </p:nvSpPr>
-        <p:spPr>
-          <a:xfrm>
-            <a:off x="0" y="0"/>
-            <a:ext cx="12191695" cy="566928"/>
-          </a:xfrm>
-          <a:prstGeom prst="rect">
-            <a:avLst/>
-          </a:prstGeom>
-          <a:solidFill>
-            <a:srgbClr val="EA580C"/>
-          </a:solidFill>
-          <a:ln>
-            <a:noFill/>
-          </a:ln>
-          <a:effectLst/>
-        </p:spPr>
-        <p:style>
-          <a:lnRef idx="1">
-            <a:schemeClr val="accent1"/>
-          </a:lnRef>
-          <a:fillRef idx="3">
-            <a:schemeClr val="accent1"/>
-          </a:fillRef>
-          <a:effectRef idx="2">
-            <a:schemeClr val="accent1"/>
-          </a:effectRef>
-          <a:fontRef idx="minor">
-            <a:schemeClr val="lt1"/>
-          </a:fontRef>
-        </p:style>
-        <p:txBody>
-          <a:bodyPr rtlCol="0" anchor="ctr"/>
-          <a:lstStyle/>
-          <a:p>
-            <a:pPr algn="ctr"/>
-          </a:p>
-        </p:txBody>
-      </p:sp>
-      <p:sp>
-        <p:nvSpPr>
-          <p:cNvPr id="3" name="Rectangle 2"/>
-          <p:cNvSpPr/>
-          <p:nvPr/>
-        </p:nvSpPr>
-        <p:spPr>
-          <a:xfrm>
-            <a:off x="0" y="566928"/>
-            <a:ext cx="12191695" cy="54864"/>
-          </a:xfrm>
-          <a:prstGeom prst="rect">
-            <a:avLst/>
-          </a:prstGeom>
-          <a:solidFill>
-            <a:srgbClr val="FFB020"/>
-          </a:solidFill>
-          <a:ln>
-            <a:noFill/>
-          </a:ln>
-          <a:effectLst/>
-        </p:spPr>
-        <p:style>
-          <a:lnRef idx="1">
-            <a:schemeClr val="accent1"/>
-          </a:lnRef>
-          <a:fillRef idx="3">
-            <a:schemeClr val="accent1"/>
-          </a:fillRef>
-          <a:effectRef idx="2">
-            <a:schemeClr val="accent1"/>
-          </a:effectRef>
-          <a:fontRef idx="minor">
-            <a:schemeClr val="lt1"/>
-          </a:fontRef>
-        </p:style>
-        <p:txBody>
-          <a:bodyPr rtlCol="0" anchor="ctr"/>
-          <a:lstStyle/>
-          <a:p>
-            <a:pPr algn="ctr"/>
-          </a:p>
-        </p:txBody>
-      </p:sp>
-      <p:sp>
-        <p:nvSpPr>
-          <p:cNvPr id="4" name="TextBox 3"/>
-          <p:cNvSpPr txBox="1"/>
-          <p:nvPr/>
-        </p:nvSpPr>
-        <p:spPr>
-          <a:xfrm>
-            <a:off x="365760" y="27432"/>
-            <a:ext cx="7315200" cy="502920"/>
-          </a:xfrm>
-          <a:prstGeom prst="rect">
-            <a:avLst/>
-          </a:prstGeom>
-          <a:noFill/>
-        </p:spPr>
-        <p:txBody>
-          <a:bodyPr wrap="square" anchor="ctr">
-            <a:spAutoFit/>
-          </a:bodyPr>
-          <a:lstStyle/>
-          <a:p>
-            <a:pPr algn="l">
-              <a:lnSpc>
-                <a:spcPct val="100000"/>
-              </a:lnSpc>
-            </a:pPr>
-            <a:r>
-              <a:rPr sz="1500" b="1">
-                <a:solidFill>
-                  <a:srgbClr val="FFFFFF"/>
-                </a:solidFill>
-                <a:latin typeface="Malgun Gothic"/>
-              </a:rPr>
-              <a:t>👩‍🏫 Mangoi Teacher User Guide</a:t>
-            </a:r>
-          </a:p>
-        </p:txBody>
-      </p:sp>
-      <p:sp>
-        <p:nvSpPr>
-          <p:cNvPr id="5" name="TextBox 4"/>
-          <p:cNvSpPr txBox="1"/>
-          <p:nvPr/>
-        </p:nvSpPr>
-        <p:spPr>
-          <a:xfrm>
-            <a:off x="8168335" y="27432"/>
-            <a:ext cx="3657600" cy="502920"/>
-          </a:xfrm>
-          <a:prstGeom prst="rect">
-            <a:avLst/>
-          </a:prstGeom>
-          <a:noFill/>
-        </p:spPr>
-        <p:txBody>
-          <a:bodyPr wrap="square" anchor="ctr">
-            <a:spAutoFit/>
-          </a:bodyPr>
-          <a:lstStyle/>
-          <a:p>
-            <a:pPr algn="r">
-              <a:lnSpc>
-                <a:spcPct val="100000"/>
-              </a:lnSpc>
-            </a:pPr>
-            <a:r>
-              <a:rPr sz="1300" b="1">
-                <a:solidFill>
-                  <a:srgbClr val="F1F5F9"/>
-                </a:solidFill>
-                <a:latin typeface="Malgun Gothic"/>
-              </a:rPr>
-              <a:t>Data at a Glance</a:t>
-            </a:r>
-          </a:p>
-        </p:txBody>
-      </p:sp>
-      <p:sp>
-        <p:nvSpPr>
-          <p:cNvPr id="6" name="TextBox 5"/>
-          <p:cNvSpPr txBox="1"/>
-          <p:nvPr/>
-        </p:nvSpPr>
-        <p:spPr>
-          <a:xfrm>
-            <a:off x="365760" y="868680"/>
-            <a:ext cx="9144000" cy="457200"/>
-          </a:xfrm>
-          <a:prstGeom prst="rect">
-            <a:avLst/>
-          </a:prstGeom>
-          <a:noFill/>
-        </p:spPr>
-        <p:txBody>
-          <a:bodyPr wrap="square" anchor="t">
-            <a:spAutoFit/>
-          </a:bodyPr>
-          <a:lstStyle/>
-          <a:p>
-            <a:pPr algn="l">
-              <a:lnSpc>
-                <a:spcPct val="100000"/>
-              </a:lnSpc>
-            </a:pPr>
-            <a:r>
-              <a:rPr sz="2200" b="1">
-                <a:solidFill>
-                  <a:srgbClr val="EA580C"/>
-                </a:solidFill>
-                <a:latin typeface="Malgun Gothic"/>
-              </a:rPr>
-              <a:t>📊 Data at a Glance</a:t>
-            </a:r>
-          </a:p>
-        </p:txBody>
-      </p:sp>
-      <p:sp>
-        <p:nvSpPr>
-          <p:cNvPr id="7" name="TextBox 6"/>
-          <p:cNvSpPr txBox="1"/>
-          <p:nvPr/>
-        </p:nvSpPr>
-        <p:spPr>
-          <a:xfrm>
-            <a:off x="457200" y="1554480"/>
-            <a:ext cx="5486400" cy="365760"/>
-          </a:xfrm>
-          <a:prstGeom prst="rect">
-            <a:avLst/>
-          </a:prstGeom>
-          <a:noFill/>
-        </p:spPr>
-        <p:txBody>
-          <a:bodyPr wrap="square" anchor="t">
-            <a:spAutoFit/>
-          </a:bodyPr>
-          <a:lstStyle/>
-          <a:p>
-            <a:pPr algn="l">
-              <a:lnSpc>
-                <a:spcPct val="100000"/>
-              </a:lnSpc>
-            </a:pPr>
-            <a:r>
-              <a:rPr sz="1400" b="1">
-                <a:solidFill>
-                  <a:srgbClr val="1E2340"/>
-                </a:solidFill>
-                <a:latin typeface="Malgun Gothic"/>
-              </a:rPr>
-              <a:t>Pre-check Items (example scores)</a:t>
-            </a:r>
-          </a:p>
-        </p:txBody>
-      </p:sp>
-      <p:graphicFrame>
-        <p:nvGraphicFramePr>
-          <p:cNvPr id="8" name="Chart 7"/>
-          <p:cNvGraphicFramePr>
-            <a:graphicFrameLocks noGrp="1"/>
-          </p:cNvGraphicFramePr>
-          <p:nvPr/>
-        </p:nvGraphicFramePr>
-        <p:xfrm>
-          <a:off x="457200" y="1920240"/>
-          <a:ext cx="5486400" cy="4206240"/>
-        </p:xfrm>
-        <a:graphic>
-          <a:graphicData uri="http://schemas.openxmlformats.org/drawingml/2006/chart">
-            <c:chart xmlns:c="http://schemas.openxmlformats.org/drawingml/2006/chart" r:id="rId2"/>
-          </a:graphicData>
-        </a:graphic>
-      </p:graphicFrame>
-      <p:sp>
-        <p:nvSpPr>
-          <p:cNvPr id="9" name="TextBox 8"/>
-          <p:cNvSpPr txBox="1"/>
-          <p:nvPr/>
-        </p:nvSpPr>
-        <p:spPr>
-          <a:xfrm>
-            <a:off x="6309360" y="1554480"/>
-            <a:ext cx="5486400" cy="365760"/>
-          </a:xfrm>
-          <a:prstGeom prst="rect">
-            <a:avLst/>
-          </a:prstGeom>
-          <a:noFill/>
-        </p:spPr>
-        <p:txBody>
-          <a:bodyPr wrap="square" anchor="t">
-            <a:spAutoFit/>
-          </a:bodyPr>
-          <a:lstStyle/>
-          <a:p>
-            <a:pPr algn="l">
-              <a:lnSpc>
-                <a:spcPct val="100000"/>
-              </a:lnSpc>
-            </a:pPr>
-            <a:r>
-              <a:rPr sz="1400" b="1">
-                <a:solidFill>
-                  <a:srgbClr val="1E2340"/>
-                </a:solidFill>
-                <a:latin typeface="Malgun Gothic"/>
-              </a:rPr>
-              <a:t>Elements of a Good Lesson</a:t>
-            </a:r>
-          </a:p>
-        </p:txBody>
-      </p:sp>
-      <p:graphicFrame>
-        <p:nvGraphicFramePr>
-          <p:cNvPr id="10" name="Chart 9"/>
-          <p:cNvGraphicFramePr>
-            <a:graphicFrameLocks noGrp="1"/>
-          </p:cNvGraphicFramePr>
-          <p:nvPr/>
-        </p:nvGraphicFramePr>
-        <p:xfrm>
-          <a:off x="6309360" y="1920240"/>
-          <a:ext cx="5486400" cy="4206240"/>
-        </p:xfrm>
-        <a:graphic>
-          <a:graphicData uri="http://schemas.openxmlformats.org/drawingml/2006/chart">
-            <c:chart xmlns:c="http://schemas.openxmlformats.org/drawingml/2006/chart" r:id="rId3"/>
-          </a:graphicData>
-        </a:graphic>
-      </p:graphicFrame>
-    </p:spTree>
-  </p:cSld>
-  <p:clrMapOvr>
-    <a:masterClrMapping/>
-  </p:clrMapOvr>
-</p:sld>
-</file>
-
 <file path=ppt/slides/slide3.xml><?xml version="1.0" encoding="utf-8"?>
 <p:sld xmlns:a="http://schemas.openxmlformats.org/drawingml/2006/main" xmlns:p="http://schemas.openxmlformats.org/presentationml/2006/main" xmlns:r="http://schemas.openxmlformats.org/officeDocument/2006/relationships">
   <p:cSld>
@@ -24856,6 +25554,351 @@
                 </a:solidFill>
                 <a:latin typeface="Malgun Gothic"/>
               </a:rPr>
+              <a:t>Data at a Glance</a:t>
+            </a:r>
+          </a:p>
+        </p:txBody>
+      </p:sp>
+      <p:sp>
+        <p:nvSpPr>
+          <p:cNvPr id="6" name="TextBox 5"/>
+          <p:cNvSpPr txBox="1"/>
+          <p:nvPr/>
+        </p:nvSpPr>
+        <p:spPr>
+          <a:xfrm>
+            <a:off x="365760" y="868680"/>
+            <a:ext cx="9144000" cy="457200"/>
+          </a:xfrm>
+          <a:prstGeom prst="rect">
+            <a:avLst/>
+          </a:prstGeom>
+          <a:noFill/>
+        </p:spPr>
+        <p:txBody>
+          <a:bodyPr wrap="square" anchor="t">
+            <a:spAutoFit/>
+          </a:bodyPr>
+          <a:lstStyle/>
+          <a:p>
+            <a:pPr algn="l">
+              <a:lnSpc>
+                <a:spcPct val="100000"/>
+              </a:lnSpc>
+            </a:pPr>
+            <a:r>
+              <a:rPr sz="2200" b="1">
+                <a:solidFill>
+                  <a:srgbClr val="EA580C"/>
+                </a:solidFill>
+                <a:latin typeface="Malgun Gothic"/>
+              </a:rPr>
+              <a:t>📊 Data at a Glance</a:t>
+            </a:r>
+          </a:p>
+        </p:txBody>
+      </p:sp>
+      <p:sp>
+        <p:nvSpPr>
+          <p:cNvPr id="7" name="TextBox 6"/>
+          <p:cNvSpPr txBox="1"/>
+          <p:nvPr/>
+        </p:nvSpPr>
+        <p:spPr>
+          <a:xfrm>
+            <a:off x="457200" y="1554480"/>
+            <a:ext cx="5486400" cy="365760"/>
+          </a:xfrm>
+          <a:prstGeom prst="rect">
+            <a:avLst/>
+          </a:prstGeom>
+          <a:noFill/>
+        </p:spPr>
+        <p:txBody>
+          <a:bodyPr wrap="square" anchor="t">
+            <a:spAutoFit/>
+          </a:bodyPr>
+          <a:lstStyle/>
+          <a:p>
+            <a:pPr algn="l">
+              <a:lnSpc>
+                <a:spcPct val="100000"/>
+              </a:lnSpc>
+            </a:pPr>
+            <a:r>
+              <a:rPr sz="1400" b="1">
+                <a:solidFill>
+                  <a:srgbClr val="1E2340"/>
+                </a:solidFill>
+                <a:latin typeface="Malgun Gothic"/>
+              </a:rPr>
+              <a:t>Pre-check Items (example scores)</a:t>
+            </a:r>
+          </a:p>
+        </p:txBody>
+      </p:sp>
+      <p:graphicFrame>
+        <p:nvGraphicFramePr>
+          <p:cNvPr id="8" name="Chart 7"/>
+          <p:cNvGraphicFramePr>
+            <a:graphicFrameLocks noGrp="1"/>
+          </p:cNvGraphicFramePr>
+          <p:nvPr/>
+        </p:nvGraphicFramePr>
+        <p:xfrm>
+          <a:off x="457200" y="1920240"/>
+          <a:ext cx="5486400" cy="4206240"/>
+        </p:xfrm>
+        <a:graphic>
+          <a:graphicData uri="http://schemas.openxmlformats.org/drawingml/2006/chart">
+            <c:chart xmlns:c="http://schemas.openxmlformats.org/drawingml/2006/chart" r:id="rId2"/>
+          </a:graphicData>
+        </a:graphic>
+      </p:graphicFrame>
+      <p:sp>
+        <p:nvSpPr>
+          <p:cNvPr id="9" name="TextBox 8"/>
+          <p:cNvSpPr txBox="1"/>
+          <p:nvPr/>
+        </p:nvSpPr>
+        <p:spPr>
+          <a:xfrm>
+            <a:off x="6309360" y="1554480"/>
+            <a:ext cx="5486400" cy="365760"/>
+          </a:xfrm>
+          <a:prstGeom prst="rect">
+            <a:avLst/>
+          </a:prstGeom>
+          <a:noFill/>
+        </p:spPr>
+        <p:txBody>
+          <a:bodyPr wrap="square" anchor="t">
+            <a:spAutoFit/>
+          </a:bodyPr>
+          <a:lstStyle/>
+          <a:p>
+            <a:pPr algn="l">
+              <a:lnSpc>
+                <a:spcPct val="100000"/>
+              </a:lnSpc>
+            </a:pPr>
+            <a:r>
+              <a:rPr sz="1400" b="1">
+                <a:solidFill>
+                  <a:srgbClr val="1E2340"/>
+                </a:solidFill>
+                <a:latin typeface="Malgun Gothic"/>
+              </a:rPr>
+              <a:t>Elements of a Good Lesson</a:t>
+            </a:r>
+          </a:p>
+        </p:txBody>
+      </p:sp>
+      <p:graphicFrame>
+        <p:nvGraphicFramePr>
+          <p:cNvPr id="10" name="Chart 9"/>
+          <p:cNvGraphicFramePr>
+            <a:graphicFrameLocks noGrp="1"/>
+          </p:cNvGraphicFramePr>
+          <p:nvPr/>
+        </p:nvGraphicFramePr>
+        <p:xfrm>
+          <a:off x="6309360" y="1920240"/>
+          <a:ext cx="5486400" cy="4206240"/>
+        </p:xfrm>
+        <a:graphic>
+          <a:graphicData uri="http://schemas.openxmlformats.org/drawingml/2006/chart">
+            <c:chart xmlns:c="http://schemas.openxmlformats.org/drawingml/2006/chart" r:id="rId3"/>
+          </a:graphicData>
+        </a:graphic>
+      </p:graphicFrame>
+    </p:spTree>
+  </p:cSld>
+  <p:clrMapOvr>
+    <a:masterClrMapping/>
+  </p:clrMapOvr>
+</p:sld>
+</file>
+
+<file path=ppt/slides/slide31.xml><?xml version="1.0" encoding="utf-8"?>
+<p:sld xmlns:a="http://schemas.openxmlformats.org/drawingml/2006/main" xmlns:p="http://schemas.openxmlformats.org/presentationml/2006/main" xmlns:r="http://schemas.openxmlformats.org/officeDocument/2006/relationships">
+  <p:cSld>
+    <p:bg>
+      <p:bgPr>
+        <a:solidFill>
+          <a:srgbClr val="FFFFFF"/>
+        </a:solidFill>
+        <a:effectLst/>
+      </p:bgPr>
+    </p:bg>
+    <p:spTree>
+      <p:nvGrpSpPr>
+        <p:cNvPr id="1" name=""/>
+        <p:cNvGrpSpPr/>
+        <p:nvPr/>
+      </p:nvGrpSpPr>
+      <p:grpSpPr/>
+      <p:sp>
+        <p:nvSpPr>
+          <p:cNvPr id="2" name="Rectangle 1"/>
+          <p:cNvSpPr/>
+          <p:nvPr/>
+        </p:nvSpPr>
+        <p:spPr>
+          <a:xfrm>
+            <a:off x="0" y="0"/>
+            <a:ext cx="12191695" cy="566928"/>
+          </a:xfrm>
+          <a:prstGeom prst="rect">
+            <a:avLst/>
+          </a:prstGeom>
+          <a:solidFill>
+            <a:srgbClr val="EA580C"/>
+          </a:solidFill>
+          <a:ln>
+            <a:noFill/>
+          </a:ln>
+          <a:effectLst/>
+        </p:spPr>
+        <p:style>
+          <a:lnRef idx="1">
+            <a:schemeClr val="accent1"/>
+          </a:lnRef>
+          <a:fillRef idx="3">
+            <a:schemeClr val="accent1"/>
+          </a:fillRef>
+          <a:effectRef idx="2">
+            <a:schemeClr val="accent1"/>
+          </a:effectRef>
+          <a:fontRef idx="minor">
+            <a:schemeClr val="lt1"/>
+          </a:fontRef>
+        </p:style>
+        <p:txBody>
+          <a:bodyPr rtlCol="0" anchor="ctr"/>
+          <a:lstStyle/>
+          <a:p>
+            <a:pPr algn="ctr"/>
+          </a:p>
+        </p:txBody>
+      </p:sp>
+      <p:sp>
+        <p:nvSpPr>
+          <p:cNvPr id="3" name="Rectangle 2"/>
+          <p:cNvSpPr/>
+          <p:nvPr/>
+        </p:nvSpPr>
+        <p:spPr>
+          <a:xfrm>
+            <a:off x="0" y="566928"/>
+            <a:ext cx="12191695" cy="54864"/>
+          </a:xfrm>
+          <a:prstGeom prst="rect">
+            <a:avLst/>
+          </a:prstGeom>
+          <a:solidFill>
+            <a:srgbClr val="FFB020"/>
+          </a:solidFill>
+          <a:ln>
+            <a:noFill/>
+          </a:ln>
+          <a:effectLst/>
+        </p:spPr>
+        <p:style>
+          <a:lnRef idx="1">
+            <a:schemeClr val="accent1"/>
+          </a:lnRef>
+          <a:fillRef idx="3">
+            <a:schemeClr val="accent1"/>
+          </a:fillRef>
+          <a:effectRef idx="2">
+            <a:schemeClr val="accent1"/>
+          </a:effectRef>
+          <a:fontRef idx="minor">
+            <a:schemeClr val="lt1"/>
+          </a:fontRef>
+        </p:style>
+        <p:txBody>
+          <a:bodyPr rtlCol="0" anchor="ctr"/>
+          <a:lstStyle/>
+          <a:p>
+            <a:pPr algn="ctr"/>
+          </a:p>
+        </p:txBody>
+      </p:sp>
+      <p:sp>
+        <p:nvSpPr>
+          <p:cNvPr id="4" name="TextBox 3"/>
+          <p:cNvSpPr txBox="1"/>
+          <p:nvPr/>
+        </p:nvSpPr>
+        <p:spPr>
+          <a:xfrm>
+            <a:off x="365760" y="27432"/>
+            <a:ext cx="7315200" cy="502920"/>
+          </a:xfrm>
+          <a:prstGeom prst="rect">
+            <a:avLst/>
+          </a:prstGeom>
+          <a:noFill/>
+        </p:spPr>
+        <p:txBody>
+          <a:bodyPr wrap="square" anchor="ctr">
+            <a:spAutoFit/>
+          </a:bodyPr>
+          <a:lstStyle/>
+          <a:p>
+            <a:pPr algn="l">
+              <a:lnSpc>
+                <a:spcPct val="100000"/>
+              </a:lnSpc>
+            </a:pPr>
+            <a:r>
+              <a:rPr sz="1500" b="1">
+                <a:solidFill>
+                  <a:srgbClr val="FFFFFF"/>
+                </a:solidFill>
+                <a:latin typeface="Malgun Gothic"/>
+              </a:rPr>
+              <a:t>👩‍🏫 Mangoi Teacher User Guide</a:t>
+            </a:r>
+          </a:p>
+        </p:txBody>
+      </p:sp>
+      <p:sp>
+        <p:nvSpPr>
+          <p:cNvPr id="5" name="TextBox 4"/>
+          <p:cNvSpPr txBox="1"/>
+          <p:nvPr/>
+        </p:nvSpPr>
+        <p:spPr>
+          <a:xfrm>
+            <a:off x="8168335" y="27432"/>
+            <a:ext cx="3657600" cy="502920"/>
+          </a:xfrm>
+          <a:prstGeom prst="rect">
+            <a:avLst/>
+          </a:prstGeom>
+          <a:noFill/>
+        </p:spPr>
+        <p:txBody>
+          <a:bodyPr wrap="square" anchor="ctr">
+            <a:spAutoFit/>
+          </a:bodyPr>
+          <a:lstStyle/>
+          <a:p>
+            <a:pPr algn="r">
+              <a:lnSpc>
+                <a:spcPct val="100000"/>
+              </a:lnSpc>
+            </a:pPr>
+            <a:r>
+              <a:rPr sz="1300" b="1">
+                <a:solidFill>
+                  <a:srgbClr val="F1F5F9"/>
+                </a:solidFill>
+                <a:latin typeface="Malgun Gothic"/>
+              </a:rPr>
               <a:t>Frequently Asked Questions (FAQ)</a:t>
             </a:r>
           </a:p>
@@ -25652,7 +26695,7 @@
 </p:sld>
 </file>
 
-<file path=ppt/slides/slide31.xml><?xml version="1.0" encoding="utf-8"?>
+<file path=ppt/slides/slide32.xml><?xml version="1.0" encoding="utf-8"?>
 <p:sld xmlns:a="http://schemas.openxmlformats.org/drawingml/2006/main" xmlns:p="http://schemas.openxmlformats.org/presentationml/2006/main" xmlns:r="http://schemas.openxmlformats.org/officeDocument/2006/relationships">
   <p:cSld>
     <p:bg>
@@ -26587,7 +27630,7 @@
 </p:sld>
 </file>
 
-<file path=ppt/slides/slide32.xml><?xml version="1.0" encoding="utf-8"?>
+<file path=ppt/slides/slide33.xml><?xml version="1.0" encoding="utf-8"?>
 <p:sld xmlns:a="http://schemas.openxmlformats.org/drawingml/2006/main" xmlns:p="http://schemas.openxmlformats.org/presentationml/2006/main" xmlns:r="http://schemas.openxmlformats.org/officeDocument/2006/relationships">
   <p:cSld>
     <p:bg>
@@ -28377,7 +29420,7 @@
 </p:sld>
 </file>
 
-<file path=ppt/slides/slide33.xml><?xml version="1.0" encoding="utf-8"?>
+<file path=ppt/slides/slide34.xml><?xml version="1.0" encoding="utf-8"?>
 <p:sld xmlns:a="http://schemas.openxmlformats.org/drawingml/2006/main" xmlns:p="http://schemas.openxmlformats.org/presentationml/2006/main" xmlns:r="http://schemas.openxmlformats.org/officeDocument/2006/relationships">
   <p:cSld>
     <p:bg>

--- a/cloudflare-deploy/public/library/teacher/teacher-en.pptx
+++ b/cloudflare-deploy/public/library/teacher/teacher-en.pptx
@@ -4091,7 +4091,7 @@
                 </a:solidFill>
                 <a:latin typeface="Malgun Gothic"/>
               </a:rPr>
-              <a:t>For · Native-speaker teachers and Korean instructors   |   test.mangoi.co.kr</a:t>
+              <a:t>For · Native-speaker teachers and Korean instructors   |   www.mangoi.co.kr</a:t>
             </a:r>
           </a:p>
         </p:txBody>
@@ -29682,7 +29682,7 @@
                 </a:solidFill>
                 <a:latin typeface="Malgun Gothic"/>
               </a:rPr>
-              <a:t>🌐 test.mangoi.co.kr    📞 1588-0000    ✉ support@mangoi.co.kr</a:t>
+              <a:t>🌐 www.mangoi.co.kr    📞 1644-0561    ✉ support@mangoi.co.kr</a:t>
             </a:r>
           </a:p>
         </p:txBody>

--- a/cloudflare-deploy/public/library/teacher/teacher-en.pptx
+++ b/cloudflare-deploy/public/library/teacher/teacher-en.pptx
@@ -6,6 +6,7 @@
   </p:sldMasterIdLst>
   <p:sldIdLst>
     <p:sldId id="256" r:id="rId7"/>
+    <p:sldId id="290" r:id="rId41"/>
     <p:sldId id="257" r:id="rId8"/>
     <p:sldId id="258" r:id="rId9"/>
     <p:sldId id="259" r:id="rId10"/>
@@ -23467,7 +23468,7 @@
         </p:nvSpPr>
         <p:spPr>
           <a:xfrm>
-            <a:off x="365760" y="868680"/>
+            <a:off x="987552" y="868680"/>
             <a:ext cx="9144000" cy="457200"/>
           </a:xfrm>
           <a:prstGeom prst="rect">
@@ -24466,6 +24467,89 @@
           </a:graphicData>
         </a:graphic>
       </p:graphicFrame>
+      <p:sp>
+        <p:nvSpPr>
+          <p:cNvPr id="6" name="Rounded Rectangle 5"/>
+          <p:cNvSpPr/>
+          <p:nvPr/>
+        </p:nvSpPr>
+        <p:spPr>
+          <a:xfrm>
+            <a:off x="365760" y="841247"/>
+            <a:ext cx="475488" cy="475488"/>
+          </a:xfrm>
+          <a:prstGeom prst="roundRect">
+            <a:avLst/>
+          </a:prstGeom>
+          <a:solidFill>
+            <a:srgbClr val="EA580C"/>
+          </a:solidFill>
+          <a:ln>
+            <a:noFill/>
+          </a:ln>
+          <a:effectLst/>
+        </p:spPr>
+        <p:style>
+          <a:lnRef idx="1">
+            <a:schemeClr val="accent1"/>
+          </a:lnRef>
+          <a:fillRef idx="3">
+            <a:schemeClr val="accent1"/>
+          </a:fillRef>
+          <a:effectRef idx="2">
+            <a:schemeClr val="accent1"/>
+          </a:effectRef>
+          <a:fontRef idx="minor">
+            <a:schemeClr val="lt1"/>
+          </a:fontRef>
+        </p:style>
+        <p:txBody>
+          <a:bodyPr rtlCol="0" anchor="ctr"/>
+          <a:lstStyle/>
+          <a:p>
+            <a:pPr algn="ctr"/>
+          </a:p>
+        </p:txBody>
+      </p:sp>
+      <p:sp>
+        <p:nvSpPr>
+          <p:cNvPr id="7" name="TextBox 6"/>
+          <p:cNvSpPr txBox="1"/>
+          <p:nvPr/>
+        </p:nvSpPr>
+        <p:spPr>
+          <a:xfrm>
+            <a:off x="365760" y="841247"/>
+            <a:ext cx="475488" cy="475488"/>
+          </a:xfrm>
+          <a:prstGeom prst="rect">
+            <a:avLst/>
+          </a:prstGeom>
+          <a:noFill/>
+        </p:spPr>
+        <p:txBody>
+          <a:bodyPr wrap="square" anchor="ctr">
+            <a:spAutoFit/>
+          </a:bodyPr>
+          <a:lstStyle/>
+          <a:p>
+            <a:pPr algn="ctr">
+              <a:lnSpc>
+                <a:spcPct val="100000"/>
+              </a:lnSpc>
+            </a:pPr>
+            <a:r>
+              <a:rPr sz="1500" b="1">
+                <a:solidFill>
+                  <a:srgbClr val="FFFFFF"/>
+                </a:solidFill>
+                <a:latin typeface="Malgun Gothic"/>
+              </a:rPr>
+              <a:t>27</a:t>
+            </a:r>
+          </a:p>
+        </p:txBody>
+      </p:sp>
     </p:spTree>
   </p:cSld>
   <p:clrMapOvr>
@@ -25567,7 +25651,7 @@
         </p:nvSpPr>
         <p:spPr>
           <a:xfrm>
-            <a:off x="365760" y="868680"/>
+            <a:off x="987552" y="868680"/>
             <a:ext cx="9144000" cy="457200"/>
           </a:xfrm>
           <a:prstGeom prst="rect">
@@ -25712,6 +25796,89 @@
           </a:graphicData>
         </a:graphic>
       </p:graphicFrame>
+      <p:sp>
+        <p:nvSpPr>
+          <p:cNvPr id="6" name="Rounded Rectangle 5"/>
+          <p:cNvSpPr/>
+          <p:nvPr/>
+        </p:nvSpPr>
+        <p:spPr>
+          <a:xfrm>
+            <a:off x="365760" y="841247"/>
+            <a:ext cx="475488" cy="475488"/>
+          </a:xfrm>
+          <a:prstGeom prst="roundRect">
+            <a:avLst/>
+          </a:prstGeom>
+          <a:solidFill>
+            <a:srgbClr val="EA580C"/>
+          </a:solidFill>
+          <a:ln>
+            <a:noFill/>
+          </a:ln>
+          <a:effectLst/>
+        </p:spPr>
+        <p:style>
+          <a:lnRef idx="1">
+            <a:schemeClr val="accent1"/>
+          </a:lnRef>
+          <a:fillRef idx="3">
+            <a:schemeClr val="accent1"/>
+          </a:fillRef>
+          <a:effectRef idx="2">
+            <a:schemeClr val="accent1"/>
+          </a:effectRef>
+          <a:fontRef idx="minor">
+            <a:schemeClr val="lt1"/>
+          </a:fontRef>
+        </p:style>
+        <p:txBody>
+          <a:bodyPr rtlCol="0" anchor="ctr"/>
+          <a:lstStyle/>
+          <a:p>
+            <a:pPr algn="ctr"/>
+          </a:p>
+        </p:txBody>
+      </p:sp>
+      <p:sp>
+        <p:nvSpPr>
+          <p:cNvPr id="7" name="TextBox 6"/>
+          <p:cNvSpPr txBox="1"/>
+          <p:nvPr/>
+        </p:nvSpPr>
+        <p:spPr>
+          <a:xfrm>
+            <a:off x="365760" y="841247"/>
+            <a:ext cx="475488" cy="475488"/>
+          </a:xfrm>
+          <a:prstGeom prst="rect">
+            <a:avLst/>
+          </a:prstGeom>
+          <a:noFill/>
+        </p:spPr>
+        <p:txBody>
+          <a:bodyPr wrap="square" anchor="ctr">
+            <a:spAutoFit/>
+          </a:bodyPr>
+          <a:lstStyle/>
+          <a:p>
+            <a:pPr algn="ctr">
+              <a:lnSpc>
+                <a:spcPct val="100000"/>
+              </a:lnSpc>
+            </a:pPr>
+            <a:r>
+              <a:rPr sz="1500" b="1">
+                <a:solidFill>
+                  <a:srgbClr val="FFFFFF"/>
+                </a:solidFill>
+                <a:latin typeface="Malgun Gothic"/>
+              </a:rPr>
+              <a:t>28</a:t>
+            </a:r>
+          </a:p>
+        </p:txBody>
+      </p:sp>
     </p:spTree>
   </p:cSld>
   <p:clrMapOvr>
@@ -25912,7 +26079,7 @@
         </p:nvSpPr>
         <p:spPr>
           <a:xfrm>
-            <a:off x="365760" y="868680"/>
+            <a:off x="987552" y="868680"/>
             <a:ext cx="9144000" cy="457200"/>
           </a:xfrm>
           <a:prstGeom prst="rect">
@@ -26683,6 +26850,89 @@
                 <a:latin typeface="Malgun Gothic"/>
               </a:rPr>
               <a:t>A. Look up by student ID in the game learning report to see often-missed weak words.</a:t>
+            </a:r>
+          </a:p>
+        </p:txBody>
+      </p:sp>
+      <p:sp>
+        <p:nvSpPr>
+          <p:cNvPr id="6" name="Rounded Rectangle 5"/>
+          <p:cNvSpPr/>
+          <p:nvPr/>
+        </p:nvSpPr>
+        <p:spPr>
+          <a:xfrm>
+            <a:off x="365760" y="841247"/>
+            <a:ext cx="475488" cy="475488"/>
+          </a:xfrm>
+          <a:prstGeom prst="roundRect">
+            <a:avLst/>
+          </a:prstGeom>
+          <a:solidFill>
+            <a:srgbClr val="EA580C"/>
+          </a:solidFill>
+          <a:ln>
+            <a:noFill/>
+          </a:ln>
+          <a:effectLst/>
+        </p:spPr>
+        <p:style>
+          <a:lnRef idx="1">
+            <a:schemeClr val="accent1"/>
+          </a:lnRef>
+          <a:fillRef idx="3">
+            <a:schemeClr val="accent1"/>
+          </a:fillRef>
+          <a:effectRef idx="2">
+            <a:schemeClr val="accent1"/>
+          </a:effectRef>
+          <a:fontRef idx="minor">
+            <a:schemeClr val="lt1"/>
+          </a:fontRef>
+        </p:style>
+        <p:txBody>
+          <a:bodyPr rtlCol="0" anchor="ctr"/>
+          <a:lstStyle/>
+          <a:p>
+            <a:pPr algn="ctr"/>
+          </a:p>
+        </p:txBody>
+      </p:sp>
+      <p:sp>
+        <p:nvSpPr>
+          <p:cNvPr id="7" name="TextBox 6"/>
+          <p:cNvSpPr txBox="1"/>
+          <p:nvPr/>
+        </p:nvSpPr>
+        <p:spPr>
+          <a:xfrm>
+            <a:off x="365760" y="841247"/>
+            <a:ext cx="475488" cy="475488"/>
+          </a:xfrm>
+          <a:prstGeom prst="rect">
+            <a:avLst/>
+          </a:prstGeom>
+          <a:noFill/>
+        </p:spPr>
+        <p:txBody>
+          <a:bodyPr wrap="square" anchor="ctr">
+            <a:spAutoFit/>
+          </a:bodyPr>
+          <a:lstStyle/>
+          <a:p>
+            <a:pPr algn="ctr">
+              <a:lnSpc>
+                <a:spcPct val="100000"/>
+              </a:lnSpc>
+            </a:pPr>
+            <a:r>
+              <a:rPr sz="1500" b="1">
+                <a:solidFill>
+                  <a:srgbClr val="FFFFFF"/>
+                </a:solidFill>
+                <a:latin typeface="Malgun Gothic"/>
+              </a:rPr>
+              <a:t>29</a:t>
             </a:r>
           </a:p>
         </p:txBody>
@@ -26887,7 +27137,7 @@
         </p:nvSpPr>
         <p:spPr>
           <a:xfrm>
-            <a:off x="365760" y="868680"/>
+            <a:off x="987552" y="868680"/>
             <a:ext cx="9144000" cy="457200"/>
           </a:xfrm>
           <a:prstGeom prst="rect">
@@ -27622,6 +27872,89 @@
           </a:prstGeom>
         </p:spPr>
       </p:pic>
+      <p:sp>
+        <p:nvSpPr>
+          <p:cNvPr id="6" name="Rounded Rectangle 5"/>
+          <p:cNvSpPr/>
+          <p:nvPr/>
+        </p:nvSpPr>
+        <p:spPr>
+          <a:xfrm>
+            <a:off x="365760" y="841247"/>
+            <a:ext cx="475488" cy="475488"/>
+          </a:xfrm>
+          <a:prstGeom prst="roundRect">
+            <a:avLst/>
+          </a:prstGeom>
+          <a:solidFill>
+            <a:srgbClr val="EA580C"/>
+          </a:solidFill>
+          <a:ln>
+            <a:noFill/>
+          </a:ln>
+          <a:effectLst/>
+        </p:spPr>
+        <p:style>
+          <a:lnRef idx="1">
+            <a:schemeClr val="accent1"/>
+          </a:lnRef>
+          <a:fillRef idx="3">
+            <a:schemeClr val="accent1"/>
+          </a:fillRef>
+          <a:effectRef idx="2">
+            <a:schemeClr val="accent1"/>
+          </a:effectRef>
+          <a:fontRef idx="minor">
+            <a:schemeClr val="lt1"/>
+          </a:fontRef>
+        </p:style>
+        <p:txBody>
+          <a:bodyPr rtlCol="0" anchor="ctr"/>
+          <a:lstStyle/>
+          <a:p>
+            <a:pPr algn="ctr"/>
+          </a:p>
+        </p:txBody>
+      </p:sp>
+      <p:sp>
+        <p:nvSpPr>
+          <p:cNvPr id="7" name="TextBox 6"/>
+          <p:cNvSpPr txBox="1"/>
+          <p:nvPr/>
+        </p:nvSpPr>
+        <p:spPr>
+          <a:xfrm>
+            <a:off x="365760" y="841247"/>
+            <a:ext cx="475488" cy="475488"/>
+          </a:xfrm>
+          <a:prstGeom prst="rect">
+            <a:avLst/>
+          </a:prstGeom>
+          <a:noFill/>
+        </p:spPr>
+        <p:txBody>
+          <a:bodyPr wrap="square" anchor="ctr">
+            <a:spAutoFit/>
+          </a:bodyPr>
+          <a:lstStyle/>
+          <a:p>
+            <a:pPr algn="ctr">
+              <a:lnSpc>
+                <a:spcPct val="100000"/>
+              </a:lnSpc>
+            </a:pPr>
+            <a:r>
+              <a:rPr sz="1500" b="1">
+                <a:solidFill>
+                  <a:srgbClr val="FFFFFF"/>
+                </a:solidFill>
+                <a:latin typeface="Malgun Gothic"/>
+              </a:rPr>
+              <a:t>30</a:t>
+            </a:r>
+          </a:p>
+        </p:txBody>
+      </p:sp>
     </p:spTree>
   </p:cSld>
   <p:clrMapOvr>
@@ -27822,7 +28155,7 @@
         </p:nvSpPr>
         <p:spPr>
           <a:xfrm>
-            <a:off x="365760" y="822960"/>
+            <a:off x="987552" y="822960"/>
             <a:ext cx="11430000" cy="457200"/>
           </a:xfrm>
           <a:prstGeom prst="rect">
@@ -29408,6 +29741,89 @@
                 <a:latin typeface="Malgun Gothic"/>
               </a:rPr>
               <a:t>🍊 A teacher's warm words and instant praise build a child's confidence in English. Keep this guide beside you and lead every lesson with it. Praise even the small wins and students will look forward to the next class. Questions? Contact support anytime — cheering you on for lessons that grow together! 🍊</a:t>
+            </a:r>
+          </a:p>
+        </p:txBody>
+      </p:sp>
+      <p:sp>
+        <p:nvSpPr>
+          <p:cNvPr id="6" name="Rounded Rectangle 5"/>
+          <p:cNvSpPr/>
+          <p:nvPr/>
+        </p:nvSpPr>
+        <p:spPr>
+          <a:xfrm>
+            <a:off x="365760" y="795528"/>
+            <a:ext cx="475488" cy="475488"/>
+          </a:xfrm>
+          <a:prstGeom prst="roundRect">
+            <a:avLst/>
+          </a:prstGeom>
+          <a:solidFill>
+            <a:srgbClr val="EA580C"/>
+          </a:solidFill>
+          <a:ln>
+            <a:noFill/>
+          </a:ln>
+          <a:effectLst/>
+        </p:spPr>
+        <p:style>
+          <a:lnRef idx="1">
+            <a:schemeClr val="accent1"/>
+          </a:lnRef>
+          <a:fillRef idx="3">
+            <a:schemeClr val="accent1"/>
+          </a:fillRef>
+          <a:effectRef idx="2">
+            <a:schemeClr val="accent1"/>
+          </a:effectRef>
+          <a:fontRef idx="minor">
+            <a:schemeClr val="lt1"/>
+          </a:fontRef>
+        </p:style>
+        <p:txBody>
+          <a:bodyPr rtlCol="0" anchor="ctr"/>
+          <a:lstStyle/>
+          <a:p>
+            <a:pPr algn="ctr"/>
+          </a:p>
+        </p:txBody>
+      </p:sp>
+      <p:sp>
+        <p:nvSpPr>
+          <p:cNvPr id="7" name="TextBox 6"/>
+          <p:cNvSpPr txBox="1"/>
+          <p:nvPr/>
+        </p:nvSpPr>
+        <p:spPr>
+          <a:xfrm>
+            <a:off x="365760" y="795528"/>
+            <a:ext cx="475488" cy="475488"/>
+          </a:xfrm>
+          <a:prstGeom prst="rect">
+            <a:avLst/>
+          </a:prstGeom>
+          <a:noFill/>
+        </p:spPr>
+        <p:txBody>
+          <a:bodyPr wrap="square" anchor="ctr">
+            <a:spAutoFit/>
+          </a:bodyPr>
+          <a:lstStyle/>
+          <a:p>
+            <a:pPr algn="ctr">
+              <a:lnSpc>
+                <a:spcPct val="100000"/>
+              </a:lnSpc>
+            </a:pPr>
+            <a:r>
+              <a:rPr sz="1500" b="1">
+                <a:solidFill>
+                  <a:srgbClr val="FFFFFF"/>
+                </a:solidFill>
+                <a:latin typeface="Malgun Gothic"/>
+              </a:rPr>
+              <a:t>31</a:t>
             </a:r>
           </a:p>
         </p:txBody>
@@ -29683,6 +30099,1358 @@
                 <a:latin typeface="Malgun Gothic"/>
               </a:rPr>
               <a:t>🌐 www.mangoi.co.kr    📞 1644-0561    ✉ support@mangoi.co.kr</a:t>
+            </a:r>
+          </a:p>
+        </p:txBody>
+      </p:sp>
+    </p:spTree>
+  </p:cSld>
+  <p:clrMapOvr>
+    <a:masterClrMapping/>
+  </p:clrMapOvr>
+</p:sld>
+</file>
+
+<file path=ppt/slides/slide35.xml><?xml version="1.0" encoding="utf-8"?>
+<p:sld xmlns:a="http://schemas.openxmlformats.org/drawingml/2006/main" xmlns:p="http://schemas.openxmlformats.org/presentationml/2006/main" xmlns:r="http://schemas.openxmlformats.org/officeDocument/2006/relationships">
+  <p:cSld>
+    <p:spTree>
+      <p:nvGrpSpPr>
+        <p:cNvPr id="1" name=""/>
+        <p:cNvGrpSpPr/>
+        <p:nvPr/>
+      </p:nvGrpSpPr>
+      <p:grpSpPr/>
+      <p:sp>
+        <p:nvSpPr>
+          <p:cNvPr id="2" name="Rectangle 1"/>
+          <p:cNvSpPr/>
+          <p:nvPr/>
+        </p:nvSpPr>
+        <p:spPr>
+          <a:xfrm>
+            <a:off x="0" y="0"/>
+            <a:ext cx="12191695" cy="566928"/>
+          </a:xfrm>
+          <a:prstGeom prst="rect">
+            <a:avLst/>
+          </a:prstGeom>
+          <a:solidFill>
+            <a:srgbClr val="EA580C"/>
+          </a:solidFill>
+          <a:ln>
+            <a:noFill/>
+          </a:ln>
+          <a:effectLst/>
+        </p:spPr>
+        <p:style>
+          <a:lnRef idx="1">
+            <a:schemeClr val="accent1"/>
+          </a:lnRef>
+          <a:fillRef idx="3">
+            <a:schemeClr val="accent1"/>
+          </a:fillRef>
+          <a:effectRef idx="2">
+            <a:schemeClr val="accent1"/>
+          </a:effectRef>
+          <a:fontRef idx="minor">
+            <a:schemeClr val="lt1"/>
+          </a:fontRef>
+        </p:style>
+        <p:txBody>
+          <a:bodyPr rtlCol="0" anchor="ctr"/>
+          <a:lstStyle/>
+          <a:p>
+            <a:pPr algn="ctr"/>
+          </a:p>
+        </p:txBody>
+      </p:sp>
+      <p:sp>
+        <p:nvSpPr>
+          <p:cNvPr id="3" name="Rectangle 2"/>
+          <p:cNvSpPr/>
+          <p:nvPr/>
+        </p:nvSpPr>
+        <p:spPr>
+          <a:xfrm>
+            <a:off x="0" y="566928"/>
+            <a:ext cx="12191695" cy="54864"/>
+          </a:xfrm>
+          <a:prstGeom prst="rect">
+            <a:avLst/>
+          </a:prstGeom>
+          <a:solidFill>
+            <a:srgbClr val="FFB020"/>
+          </a:solidFill>
+          <a:ln>
+            <a:noFill/>
+          </a:ln>
+          <a:effectLst/>
+        </p:spPr>
+        <p:style>
+          <a:lnRef idx="1">
+            <a:schemeClr val="accent1"/>
+          </a:lnRef>
+          <a:fillRef idx="3">
+            <a:schemeClr val="accent1"/>
+          </a:fillRef>
+          <a:effectRef idx="2">
+            <a:schemeClr val="accent1"/>
+          </a:effectRef>
+          <a:fontRef idx="minor">
+            <a:schemeClr val="lt1"/>
+          </a:fontRef>
+        </p:style>
+        <p:txBody>
+          <a:bodyPr rtlCol="0" anchor="ctr"/>
+          <a:lstStyle/>
+          <a:p>
+            <a:pPr algn="ctr"/>
+          </a:p>
+        </p:txBody>
+      </p:sp>
+      <p:sp>
+        <p:nvSpPr>
+          <p:cNvPr id="4" name="TextBox 3"/>
+          <p:cNvSpPr txBox="1"/>
+          <p:nvPr/>
+        </p:nvSpPr>
+        <p:spPr>
+          <a:xfrm>
+            <a:off x="365760" y="27432"/>
+            <a:ext cx="7315200" cy="502920"/>
+          </a:xfrm>
+          <a:prstGeom prst="rect">
+            <a:avLst/>
+          </a:prstGeom>
+          <a:noFill/>
+        </p:spPr>
+        <p:txBody>
+          <a:bodyPr wrap="square" anchor="ctr">
+            <a:spAutoFit/>
+          </a:bodyPr>
+          <a:lstStyle/>
+          <a:p>
+            <a:pPr algn="l">
+              <a:lnSpc>
+                <a:spcPct val="100000"/>
+              </a:lnSpc>
+            </a:pPr>
+            <a:r>
+              <a:rPr sz="1500" b="1">
+                <a:solidFill>
+                  <a:srgbClr val="FFFFFF"/>
+                </a:solidFill>
+                <a:latin typeface="Malgun Gothic"/>
+              </a:rPr>
+              <a:t>👩‍🏫 Mangoi Teacher User Guide</a:t>
+            </a:r>
+          </a:p>
+        </p:txBody>
+      </p:sp>
+      <p:sp>
+        <p:nvSpPr>
+          <p:cNvPr id="5" name="TextBox 4"/>
+          <p:cNvSpPr txBox="1"/>
+          <p:nvPr/>
+        </p:nvSpPr>
+        <p:spPr>
+          <a:xfrm>
+            <a:off x="8168335" y="27432"/>
+            <a:ext cx="3657600" cy="502920"/>
+          </a:xfrm>
+          <a:prstGeom prst="rect">
+            <a:avLst/>
+          </a:prstGeom>
+          <a:noFill/>
+        </p:spPr>
+        <p:txBody>
+          <a:bodyPr wrap="square" anchor="ctr">
+            <a:spAutoFit/>
+          </a:bodyPr>
+          <a:lstStyle/>
+          <a:p>
+            <a:pPr algn="r">
+              <a:lnSpc>
+                <a:spcPct val="100000"/>
+              </a:lnSpc>
+            </a:pPr>
+            <a:r>
+              <a:rPr sz="1300" b="1">
+                <a:solidFill>
+                  <a:srgbClr val="F1F5F9"/>
+                </a:solidFill>
+                <a:latin typeface="Malgun Gothic"/>
+              </a:rPr>
+              <a:t>Contents</a:t>
+            </a:r>
+          </a:p>
+        </p:txBody>
+      </p:sp>
+      <p:sp>
+        <p:nvSpPr>
+          <p:cNvPr id="6" name="TextBox 5"/>
+          <p:cNvSpPr txBox="1"/>
+          <p:nvPr/>
+        </p:nvSpPr>
+        <p:spPr>
+          <a:xfrm>
+            <a:off x="365760" y="749808"/>
+            <a:ext cx="7315200" cy="502920"/>
+          </a:xfrm>
+          <a:prstGeom prst="rect">
+            <a:avLst/>
+          </a:prstGeom>
+          <a:noFill/>
+        </p:spPr>
+        <p:txBody>
+          <a:bodyPr wrap="none">
+            <a:spAutoFit/>
+          </a:bodyPr>
+          <a:lstStyle/>
+          <a:p>
+            <a:r>
+              <a:rPr sz="2200" b="1">
+                <a:solidFill>
+                  <a:srgbClr val="1E2340"/>
+                </a:solidFill>
+                <a:latin typeface="Malgun Gothic"/>
+              </a:rPr>
+              <a:t>📑 Contents</a:t>
+            </a:r>
+          </a:p>
+        </p:txBody>
+      </p:sp>
+      <p:sp>
+        <p:nvSpPr>
+          <p:cNvPr id="7" name="TextBox 6"/>
+          <p:cNvSpPr txBox="1"/>
+          <p:nvPr/>
+        </p:nvSpPr>
+        <p:spPr>
+          <a:xfrm>
+            <a:off x="365760" y="1417320"/>
+            <a:ext cx="5500116" cy="5212080"/>
+          </a:xfrm>
+          <a:prstGeom prst="rect">
+            <a:avLst/>
+          </a:prstGeom>
+          <a:noFill/>
+        </p:spPr>
+        <p:txBody>
+          <a:bodyPr wrap="none">
+            <a:spAutoFit/>
+          </a:bodyPr>
+          <a:lstStyle/>
+          <a:p>
+            <a:pPr>
+              <a:spcAft>
+                <a:spcPts val="1080"/>
+              </a:spcAft>
+            </a:pPr>
+            <a:r>
+              <a:rPr sz="1100" b="1">
+                <a:solidFill>
+                  <a:srgbClr val="4F46E5"/>
+                </a:solidFill>
+                <a:latin typeface="Malgun Gothic"/>
+              </a:rPr>
+              <a:t>·   </a:t>
+            </a:r>
+            <a:r>
+              <a:rPr sz="1100">
+                <a:solidFill>
+                  <a:srgbClr val="334155"/>
+                </a:solidFill>
+                <a:latin typeface="Malgun Gothic"/>
+              </a:rPr>
+              <a:t>Introduction</a:t>
+            </a:r>
+            <a:r>
+              <a:rPr sz="950">
+                <a:solidFill>
+                  <a:srgbClr val="94A3B8"/>
+                </a:solidFill>
+                <a:latin typeface="Malgun Gothic"/>
+              </a:rPr>
+              <a:t>   ·  p.3</a:t>
+            </a:r>
+          </a:p>
+          <a:p>
+            <a:pPr>
+              <a:spcAft>
+                <a:spcPts val="1080"/>
+              </a:spcAft>
+            </a:pPr>
+            <a:r>
+              <a:rPr sz="1100" b="1">
+                <a:solidFill>
+                  <a:srgbClr val="4F46E5"/>
+                </a:solidFill>
+                <a:latin typeface="Malgun Gothic"/>
+              </a:rPr>
+              <a:t>01  </a:t>
+            </a:r>
+            <a:r>
+              <a:rPr sz="1100">
+                <a:solidFill>
+                  <a:srgbClr val="334155"/>
+                </a:solidFill>
+                <a:latin typeface="Malgun Gothic"/>
+              </a:rPr>
+              <a:t>🩺 Pre-class Detailed Check</a:t>
+            </a:r>
+            <a:r>
+              <a:rPr sz="950">
+                <a:solidFill>
+                  <a:srgbClr val="94A3B8"/>
+                </a:solidFill>
+                <a:latin typeface="Malgun Gothic"/>
+              </a:rPr>
+              <a:t>   ·  p.4</a:t>
+            </a:r>
+          </a:p>
+          <a:p>
+            <a:pPr>
+              <a:spcAft>
+                <a:spcPts val="1080"/>
+              </a:spcAft>
+            </a:pPr>
+            <a:r>
+              <a:rPr sz="1100" b="1">
+                <a:solidFill>
+                  <a:srgbClr val="4F46E5"/>
+                </a:solidFill>
+                <a:latin typeface="Malgun Gothic"/>
+              </a:rPr>
+              <a:t>02  </a:t>
+            </a:r>
+            <a:r>
+              <a:rPr sz="1100">
+                <a:solidFill>
+                  <a:srgbClr val="334155"/>
+                </a:solidFill>
+                <a:latin typeface="Malgun Gothic"/>
+              </a:rPr>
+              <a:t>👤 Enter a Lesson from My Page</a:t>
+            </a:r>
+            <a:r>
+              <a:rPr sz="950">
+                <a:solidFill>
+                  <a:srgbClr val="94A3B8"/>
+                </a:solidFill>
+                <a:latin typeface="Malgun Gothic"/>
+              </a:rPr>
+              <a:t>   ·  p.5</a:t>
+            </a:r>
+          </a:p>
+          <a:p>
+            <a:pPr>
+              <a:spcAft>
+                <a:spcPts val="1080"/>
+              </a:spcAft>
+            </a:pPr>
+            <a:r>
+              <a:rPr sz="1100" b="1">
+                <a:solidFill>
+                  <a:srgbClr val="4F46E5"/>
+                </a:solidFill>
+                <a:latin typeface="Malgun Gothic"/>
+              </a:rPr>
+              <a:t>03  </a:t>
+            </a:r>
+            <a:r>
+              <a:rPr sz="1100">
+                <a:solidFill>
+                  <a:srgbClr val="334155"/>
+                </a:solidFill>
+                <a:latin typeface="Malgun Gothic"/>
+              </a:rPr>
+              <a:t>🧭 Make the Most of My Page</a:t>
+            </a:r>
+            <a:r>
+              <a:rPr sz="950">
+                <a:solidFill>
+                  <a:srgbClr val="94A3B8"/>
+                </a:solidFill>
+                <a:latin typeface="Malgun Gothic"/>
+              </a:rPr>
+              <a:t>   ·  p.6</a:t>
+            </a:r>
+          </a:p>
+          <a:p>
+            <a:pPr>
+              <a:spcAft>
+                <a:spcPts val="1080"/>
+              </a:spcAft>
+            </a:pPr>
+            <a:r>
+              <a:rPr sz="1100" b="1">
+                <a:solidFill>
+                  <a:srgbClr val="4F46E5"/>
+                </a:solidFill>
+                <a:latin typeface="Malgun Gothic"/>
+              </a:rPr>
+              <a:t>04  </a:t>
+            </a:r>
+            <a:r>
+              <a:rPr sz="1100">
+                <a:solidFill>
+                  <a:srgbClr val="334155"/>
+                </a:solidFill>
+                <a:latin typeface="Malgun Gothic"/>
+              </a:rPr>
+              <a:t>🎥 Enter the Classroom</a:t>
+            </a:r>
+            <a:r>
+              <a:rPr sz="950">
+                <a:solidFill>
+                  <a:srgbClr val="94A3B8"/>
+                </a:solidFill>
+                <a:latin typeface="Malgun Gothic"/>
+              </a:rPr>
+              <a:t>   ·  p.7</a:t>
+            </a:r>
+          </a:p>
+          <a:p>
+            <a:pPr>
+              <a:spcAft>
+                <a:spcPts val="1080"/>
+              </a:spcAft>
+            </a:pPr>
+            <a:r>
+              <a:rPr sz="1100" b="1">
+                <a:solidFill>
+                  <a:srgbClr val="4F46E5"/>
+                </a:solidFill>
+                <a:latin typeface="Malgun Gothic"/>
+              </a:rPr>
+              <a:t>05  </a:t>
+            </a:r>
+            <a:r>
+              <a:rPr sz="1100">
+                <a:solidFill>
+                  <a:srgbClr val="334155"/>
+                </a:solidFill>
+                <a:latin typeface="Malgun Gothic"/>
+              </a:rPr>
+              <a:t>🖥️ The Classroom at a Glance</a:t>
+            </a:r>
+            <a:r>
+              <a:rPr sz="950">
+                <a:solidFill>
+                  <a:srgbClr val="94A3B8"/>
+                </a:solidFill>
+                <a:latin typeface="Malgun Gothic"/>
+              </a:rPr>
+              <a:t>   ·  p.8</a:t>
+            </a:r>
+          </a:p>
+          <a:p>
+            <a:pPr>
+              <a:spcAft>
+                <a:spcPts val="1080"/>
+              </a:spcAft>
+            </a:pPr>
+            <a:r>
+              <a:rPr sz="1100" b="1">
+                <a:solidFill>
+                  <a:srgbClr val="4F46E5"/>
+                </a:solidFill>
+                <a:latin typeface="Malgun Gothic"/>
+              </a:rPr>
+              <a:t>06  </a:t>
+            </a:r>
+            <a:r>
+              <a:rPr sz="1100">
+                <a:solidFill>
+                  <a:srgbClr val="334155"/>
+                </a:solidFill>
+                <a:latin typeface="Malgun Gothic"/>
+              </a:rPr>
+              <a:t>🗂️ Switching the 6 Top Tabs</a:t>
+            </a:r>
+            <a:r>
+              <a:rPr sz="950">
+                <a:solidFill>
+                  <a:srgbClr val="94A3B8"/>
+                </a:solidFill>
+                <a:latin typeface="Malgun Gothic"/>
+              </a:rPr>
+              <a:t>   ·  p.9</a:t>
+            </a:r>
+          </a:p>
+          <a:p>
+            <a:pPr>
+              <a:spcAft>
+                <a:spcPts val="1080"/>
+              </a:spcAft>
+            </a:pPr>
+            <a:r>
+              <a:rPr sz="1100" b="1">
+                <a:solidFill>
+                  <a:srgbClr val="4F46E5"/>
+                </a:solidFill>
+                <a:latin typeface="Malgun Gothic"/>
+              </a:rPr>
+              <a:t>07  </a:t>
+            </a:r>
+            <a:r>
+              <a:rPr sz="1100">
+                <a:solidFill>
+                  <a:srgbClr val="334155"/>
+                </a:solidFill>
+                <a:latin typeface="Malgun Gothic"/>
+              </a:rPr>
+              <a:t>🖊️ Board Tools, One by One</a:t>
+            </a:r>
+            <a:r>
+              <a:rPr sz="950">
+                <a:solidFill>
+                  <a:srgbClr val="94A3B8"/>
+                </a:solidFill>
+                <a:latin typeface="Malgun Gothic"/>
+              </a:rPr>
+              <a:t>   ·  p.10</a:t>
+            </a:r>
+          </a:p>
+          <a:p>
+            <a:pPr>
+              <a:spcAft>
+                <a:spcPts val="1080"/>
+              </a:spcAft>
+            </a:pPr>
+            <a:r>
+              <a:rPr sz="1100" b="1">
+                <a:solidFill>
+                  <a:srgbClr val="4F46E5"/>
+                </a:solidFill>
+                <a:latin typeface="Malgun Gothic"/>
+              </a:rPr>
+              <a:t>08  </a:t>
+            </a:r>
+            <a:r>
+              <a:rPr sz="1100">
+                <a:solidFill>
+                  <a:srgbClr val="334155"/>
+                </a:solidFill>
+                <a:latin typeface="Malgun Gothic"/>
+              </a:rPr>
+              <a:t>📚 Materials Tools (share PDF…</a:t>
+            </a:r>
+            <a:r>
+              <a:rPr sz="950">
+                <a:solidFill>
+                  <a:srgbClr val="94A3B8"/>
+                </a:solidFill>
+                <a:latin typeface="Malgun Gothic"/>
+              </a:rPr>
+              <a:t>   ·  p.11</a:t>
+            </a:r>
+          </a:p>
+          <a:p>
+            <a:pPr>
+              <a:spcAft>
+                <a:spcPts val="1080"/>
+              </a:spcAft>
+            </a:pPr>
+            <a:r>
+              <a:rPr sz="1100" b="1">
+                <a:solidFill>
+                  <a:srgbClr val="4F46E5"/>
+                </a:solidFill>
+                <a:latin typeface="Malgun Gothic"/>
+              </a:rPr>
+              <a:t>09  </a:t>
+            </a:r>
+            <a:r>
+              <a:rPr sz="1100">
+                <a:solidFill>
+                  <a:srgbClr val="334155"/>
+                </a:solidFill>
+                <a:latin typeface="Malgun Gothic"/>
+              </a:rPr>
+              <a:t>✍️ Writing Tools (annotate o…</a:t>
+            </a:r>
+            <a:r>
+              <a:rPr sz="950">
+                <a:solidFill>
+                  <a:srgbClr val="94A3B8"/>
+                </a:solidFill>
+                <a:latin typeface="Malgun Gothic"/>
+              </a:rPr>
+              <a:t>   ·  p.12</a:t>
+            </a:r>
+          </a:p>
+          <a:p>
+            <a:pPr>
+              <a:spcAft>
+                <a:spcPts val="1080"/>
+              </a:spcAft>
+            </a:pPr>
+            <a:r>
+              <a:rPr sz="1100" b="1">
+                <a:solidFill>
+                  <a:srgbClr val="4F46E5"/>
+                </a:solidFill>
+                <a:latin typeface="Malgun Gothic"/>
+              </a:rPr>
+              <a:t>10  </a:t>
+            </a:r>
+            <a:r>
+              <a:rPr sz="1100">
+                <a:solidFill>
+                  <a:srgbClr val="334155"/>
+                </a:solidFill>
+                <a:latin typeface="Malgun Gothic"/>
+              </a:rPr>
+              <a:t>📹 Watch Video Together</a:t>
+            </a:r>
+            <a:r>
+              <a:rPr sz="950">
+                <a:solidFill>
+                  <a:srgbClr val="94A3B8"/>
+                </a:solidFill>
+                <a:latin typeface="Malgun Gothic"/>
+              </a:rPr>
+              <a:t>   ·  p.13</a:t>
+            </a:r>
+          </a:p>
+          <a:p>
+            <a:pPr>
+              <a:spcAft>
+                <a:spcPts val="1080"/>
+              </a:spcAft>
+            </a:pPr>
+            <a:r>
+              <a:rPr sz="1100" b="1">
+                <a:solidFill>
+                  <a:srgbClr val="4F46E5"/>
+                </a:solidFill>
+                <a:latin typeface="Malgun Gothic"/>
+              </a:rPr>
+              <a:t>11  </a:t>
+            </a:r>
+            <a:r>
+              <a:rPr sz="1100">
+                <a:solidFill>
+                  <a:srgbClr val="334155"/>
+                </a:solidFill>
+                <a:latin typeface="Malgun Gothic"/>
+              </a:rPr>
+              <a:t>🎨 Background &amp; Face Decorati…</a:t>
+            </a:r>
+            <a:r>
+              <a:rPr sz="950">
+                <a:solidFill>
+                  <a:srgbClr val="94A3B8"/>
+                </a:solidFill>
+                <a:latin typeface="Malgun Gothic"/>
+              </a:rPr>
+              <a:t>   ·  p.14</a:t>
+            </a:r>
+          </a:p>
+          <a:p>
+            <a:pPr>
+              <a:spcAft>
+                <a:spcPts val="1080"/>
+              </a:spcAft>
+            </a:pPr>
+            <a:r>
+              <a:rPr sz="1100" b="1">
+                <a:solidFill>
+                  <a:srgbClr val="4F46E5"/>
+                </a:solidFill>
+                <a:latin typeface="Malgun Gothic"/>
+              </a:rPr>
+              <a:t>12  </a:t>
+            </a:r>
+            <a:r>
+              <a:rPr sz="1100">
+                <a:solidFill>
+                  <a:srgbClr val="334155"/>
+                </a:solidFill>
+                <a:latin typeface="Malgun Gothic"/>
+              </a:rPr>
+              <a:t>🔲 Resize &amp; Arrange the Screen</a:t>
+            </a:r>
+            <a:r>
+              <a:rPr sz="950">
+                <a:solidFill>
+                  <a:srgbClr val="94A3B8"/>
+                </a:solidFill>
+                <a:latin typeface="Malgun Gothic"/>
+              </a:rPr>
+              <a:t>   ·  p.15</a:t>
+            </a:r>
+          </a:p>
+          <a:p>
+            <a:pPr>
+              <a:spcAft>
+                <a:spcPts val="1080"/>
+              </a:spcAft>
+            </a:pPr>
+            <a:r>
+              <a:rPr sz="1100" b="1">
+                <a:solidFill>
+                  <a:srgbClr val="4F46E5"/>
+                </a:solidFill>
+                <a:latin typeface="Malgun Gothic"/>
+              </a:rPr>
+              <a:t>13  </a:t>
+            </a:r>
+            <a:r>
+              <a:rPr sz="1100">
+                <a:solidFill>
+                  <a:srgbClr val="334155"/>
+                </a:solidFill>
+                <a:latin typeface="Malgun Gothic"/>
+              </a:rPr>
+              <a:t>🌟 Praise Points During Class</a:t>
+            </a:r>
+            <a:r>
+              <a:rPr sz="950">
+                <a:solidFill>
+                  <a:srgbClr val="94A3B8"/>
+                </a:solidFill>
+                <a:latin typeface="Malgun Gothic"/>
+              </a:rPr>
+              <a:t>   ·  p.16</a:t>
+            </a:r>
+          </a:p>
+          <a:p>
+            <a:pPr>
+              <a:spcAft>
+                <a:spcPts val="1080"/>
+              </a:spcAft>
+            </a:pPr>
+            <a:r>
+              <a:rPr sz="1100" b="1">
+                <a:solidFill>
+                  <a:srgbClr val="4F46E5"/>
+                </a:solidFill>
+                <a:latin typeface="Malgun Gothic"/>
+              </a:rPr>
+              <a:t>14  </a:t>
+            </a:r>
+            <a:r>
+              <a:rPr sz="1100">
+                <a:solidFill>
+                  <a:srgbClr val="334155"/>
+                </a:solidFill>
+                <a:latin typeface="Malgun Gothic"/>
+              </a:rPr>
+              <a:t>🎛️ Bottom Dock &amp; Praise Bask…</a:t>
+            </a:r>
+            <a:r>
+              <a:rPr sz="950">
+                <a:solidFill>
+                  <a:srgbClr val="94A3B8"/>
+                </a:solidFill>
+                <a:latin typeface="Malgun Gothic"/>
+              </a:rPr>
+              <a:t>   ·  p.17</a:t>
+            </a:r>
+          </a:p>
+          <a:p>
+            <a:pPr>
+              <a:spcAft>
+                <a:spcPts val="1080"/>
+              </a:spcAft>
+            </a:pPr>
+            <a:r>
+              <a:rPr sz="1100" b="1">
+                <a:solidFill>
+                  <a:srgbClr val="4F46E5"/>
+                </a:solidFill>
+                <a:latin typeface="Malgun Gothic"/>
+              </a:rPr>
+              <a:t>15  </a:t>
+            </a:r>
+            <a:r>
+              <a:rPr sz="1100">
+                <a:solidFill>
+                  <a:srgbClr val="334155"/>
+                </a:solidFill>
+                <a:latin typeface="Malgun Gothic"/>
+              </a:rPr>
+              <a:t>📤 Pre-upload Materials</a:t>
+            </a:r>
+            <a:r>
+              <a:rPr sz="950">
+                <a:solidFill>
+                  <a:srgbClr val="94A3B8"/>
+                </a:solidFill>
+                <a:latin typeface="Malgun Gothic"/>
+              </a:rPr>
+              <a:t>   ·  p.18</a:t>
+            </a:r>
+          </a:p>
+        </p:txBody>
+      </p:sp>
+      <p:sp>
+        <p:nvSpPr>
+          <p:cNvPr id="8" name="TextBox 7"/>
+          <p:cNvSpPr txBox="1"/>
+          <p:nvPr/>
+        </p:nvSpPr>
+        <p:spPr>
+          <a:xfrm>
+            <a:off x="6094476" y="1417320"/>
+            <a:ext cx="5500116" cy="5212080"/>
+          </a:xfrm>
+          <a:prstGeom prst="rect">
+            <a:avLst/>
+          </a:prstGeom>
+          <a:noFill/>
+        </p:spPr>
+        <p:txBody>
+          <a:bodyPr wrap="none">
+            <a:spAutoFit/>
+          </a:bodyPr>
+          <a:lstStyle/>
+          <a:p>
+            <a:pPr>
+              <a:spcAft>
+                <a:spcPts val="1080"/>
+              </a:spcAft>
+            </a:pPr>
+            <a:r>
+              <a:rPr sz="1100" b="1">
+                <a:solidFill>
+                  <a:srgbClr val="4F46E5"/>
+                </a:solidFill>
+                <a:latin typeface="Malgun Gothic"/>
+              </a:rPr>
+              <a:t>16  </a:t>
+            </a:r>
+            <a:r>
+              <a:rPr sz="1100">
+                <a:solidFill>
+                  <a:srgbClr val="334155"/>
+                </a:solidFill>
+                <a:latin typeface="Malgun Gothic"/>
+              </a:rPr>
+              <a:t>🔥 Start with the AI Warm-up</a:t>
+            </a:r>
+            <a:r>
+              <a:rPr sz="950">
+                <a:solidFill>
+                  <a:srgbClr val="94A3B8"/>
+                </a:solidFill>
+                <a:latin typeface="Malgun Gothic"/>
+              </a:rPr>
+              <a:t>   ·  p.19</a:t>
+            </a:r>
+          </a:p>
+          <a:p>
+            <a:pPr>
+              <a:spcAft>
+                <a:spcPts val="1080"/>
+              </a:spcAft>
+            </a:pPr>
+            <a:r>
+              <a:rPr sz="1100" b="1">
+                <a:solidFill>
+                  <a:srgbClr val="4F46E5"/>
+                </a:solidFill>
+                <a:latin typeface="Malgun Gothic"/>
+              </a:rPr>
+              <a:t>17  </a:t>
+            </a:r>
+            <a:r>
+              <a:rPr sz="1100">
+                <a:solidFill>
+                  <a:srgbClr val="334155"/>
+                </a:solidFill>
+                <a:latin typeface="Malgun Gothic"/>
+              </a:rPr>
+              <a:t>🎙️ Use the Pronunciation Coa…</a:t>
+            </a:r>
+            <a:r>
+              <a:rPr sz="950">
+                <a:solidFill>
+                  <a:srgbClr val="94A3B8"/>
+                </a:solidFill>
+                <a:latin typeface="Malgun Gothic"/>
+              </a:rPr>
+              <a:t>   ·  p.20</a:t>
+            </a:r>
+          </a:p>
+          <a:p>
+            <a:pPr>
+              <a:spcAft>
+                <a:spcPts val="1080"/>
+              </a:spcAft>
+            </a:pPr>
+            <a:r>
+              <a:rPr sz="1100" b="1">
+                <a:solidFill>
+                  <a:srgbClr val="4F46E5"/>
+                </a:solidFill>
+                <a:latin typeface="Malgun Gothic"/>
+              </a:rPr>
+              <a:t>18  </a:t>
+            </a:r>
+            <a:r>
+              <a:rPr sz="1100">
+                <a:solidFill>
+                  <a:srgbClr val="334155"/>
+                </a:solidFill>
+                <a:latin typeface="Malgun Gothic"/>
+              </a:rPr>
+              <a:t>📝 Write the Lesson Review</a:t>
+            </a:r>
+            <a:r>
+              <a:rPr sz="950">
+                <a:solidFill>
+                  <a:srgbClr val="94A3B8"/>
+                </a:solidFill>
+                <a:latin typeface="Malgun Gothic"/>
+              </a:rPr>
+              <a:t>   ·  p.21</a:t>
+            </a:r>
+          </a:p>
+          <a:p>
+            <a:pPr>
+              <a:spcAft>
+                <a:spcPts val="1080"/>
+              </a:spcAft>
+            </a:pPr>
+            <a:r>
+              <a:rPr sz="1100" b="1">
+                <a:solidFill>
+                  <a:srgbClr val="4F46E5"/>
+                </a:solidFill>
+                <a:latin typeface="Malgun Gothic"/>
+              </a:rPr>
+              <a:t>19  </a:t>
+            </a:r>
+            <a:r>
+              <a:rPr sz="1100">
+                <a:solidFill>
+                  <a:srgbClr val="334155"/>
+                </a:solidFill>
+                <a:latin typeface="Malgun Gothic"/>
+              </a:rPr>
+              <a:t>🌟 Leave Student Praise</a:t>
+            </a:r>
+            <a:r>
+              <a:rPr sz="950">
+                <a:solidFill>
+                  <a:srgbClr val="94A3B8"/>
+                </a:solidFill>
+                <a:latin typeface="Malgun Gothic"/>
+              </a:rPr>
+              <a:t>   ·  p.22</a:t>
+            </a:r>
+          </a:p>
+          <a:p>
+            <a:pPr>
+              <a:spcAft>
+                <a:spcPts val="1080"/>
+              </a:spcAft>
+            </a:pPr>
+            <a:r>
+              <a:rPr sz="1100" b="1">
+                <a:solidFill>
+                  <a:srgbClr val="4F46E5"/>
+                </a:solidFill>
+                <a:latin typeface="Malgun Gothic"/>
+              </a:rPr>
+              <a:t>20  </a:t>
+            </a:r>
+            <a:r>
+              <a:rPr sz="1100">
+                <a:solidFill>
+                  <a:srgbClr val="334155"/>
+                </a:solidFill>
+                <a:latin typeface="Malgun Gothic"/>
+              </a:rPr>
+              <a:t>🧠 Game Learning Report</a:t>
+            </a:r>
+            <a:r>
+              <a:rPr sz="950">
+                <a:solidFill>
+                  <a:srgbClr val="94A3B8"/>
+                </a:solidFill>
+                <a:latin typeface="Malgun Gothic"/>
+              </a:rPr>
+              <a:t>   ·  p.23</a:t>
+            </a:r>
+          </a:p>
+          <a:p>
+            <a:pPr>
+              <a:spcAft>
+                <a:spcPts val="1080"/>
+              </a:spcAft>
+            </a:pPr>
+            <a:r>
+              <a:rPr sz="1100" b="1">
+                <a:solidFill>
+                  <a:srgbClr val="4F46E5"/>
+                </a:solidFill>
+                <a:latin typeface="Malgun Gothic"/>
+              </a:rPr>
+              <a:t>21  </a:t>
+            </a:r>
+            <a:r>
+              <a:rPr sz="1100">
+                <a:solidFill>
+                  <a:srgbClr val="334155"/>
+                </a:solidFill>
+                <a:latin typeface="Malgun Gothic"/>
+              </a:rPr>
+              <a:t>📄 Reports · Lesson Management</a:t>
+            </a:r>
+            <a:r>
+              <a:rPr sz="950">
+                <a:solidFill>
+                  <a:srgbClr val="94A3B8"/>
+                </a:solidFill>
+                <a:latin typeface="Malgun Gothic"/>
+              </a:rPr>
+              <a:t>   ·  p.24</a:t>
+            </a:r>
+          </a:p>
+          <a:p>
+            <a:pPr>
+              <a:spcAft>
+                <a:spcPts val="1080"/>
+              </a:spcAft>
+            </a:pPr>
+            <a:r>
+              <a:rPr sz="1100" b="1">
+                <a:solidFill>
+                  <a:srgbClr val="4F46E5"/>
+                </a:solidFill>
+                <a:latin typeface="Malgun Gothic"/>
+              </a:rPr>
+              <a:t>22  </a:t>
+            </a:r>
+            <a:r>
+              <a:rPr sz="1100">
+                <a:solidFill>
+                  <a:srgbClr val="334155"/>
+                </a:solidFill>
+                <a:latin typeface="Malgun Gothic"/>
+              </a:rPr>
+              <a:t>🔄 Handle Lesson Postpones</a:t>
+            </a:r>
+            <a:r>
+              <a:rPr sz="950">
+                <a:solidFill>
+                  <a:srgbClr val="94A3B8"/>
+                </a:solidFill>
+                <a:latin typeface="Malgun Gothic"/>
+              </a:rPr>
+              <a:t>   ·  p.25</a:t>
+            </a:r>
+          </a:p>
+          <a:p>
+            <a:pPr>
+              <a:spcAft>
+                <a:spcPts val="1080"/>
+              </a:spcAft>
+            </a:pPr>
+            <a:r>
+              <a:rPr sz="1100" b="1">
+                <a:solidFill>
+                  <a:srgbClr val="4F46E5"/>
+                </a:solidFill>
+                <a:latin typeface="Malgun Gothic"/>
+              </a:rPr>
+              <a:t>23  </a:t>
+            </a:r>
+            <a:r>
+              <a:rPr sz="1100">
+                <a:solidFill>
+                  <a:srgbClr val="334155"/>
+                </a:solidFill>
+                <a:latin typeface="Malgun Gothic"/>
+              </a:rPr>
+              <a:t>🎧 Support · Inquiries</a:t>
+            </a:r>
+            <a:r>
+              <a:rPr sz="950">
+                <a:solidFill>
+                  <a:srgbClr val="94A3B8"/>
+                </a:solidFill>
+                <a:latin typeface="Malgun Gothic"/>
+              </a:rPr>
+              <a:t>   ·  p.26</a:t>
+            </a:r>
+          </a:p>
+          <a:p>
+            <a:pPr>
+              <a:spcAft>
+                <a:spcPts val="1080"/>
+              </a:spcAft>
+            </a:pPr>
+            <a:r>
+              <a:rPr sz="1100" b="1">
+                <a:solidFill>
+                  <a:srgbClr val="4F46E5"/>
+                </a:solidFill>
+                <a:latin typeface="Malgun Gothic"/>
+              </a:rPr>
+              <a:t>24  </a:t>
+            </a:r>
+            <a:r>
+              <a:rPr sz="1100">
+                <a:solidFill>
+                  <a:srgbClr val="334155"/>
+                </a:solidFill>
+                <a:latin typeface="Malgun Gothic"/>
+              </a:rPr>
+              <a:t>🕐 Korea·Philippines Dual Clo…</a:t>
+            </a:r>
+            <a:r>
+              <a:rPr sz="950">
+                <a:solidFill>
+                  <a:srgbClr val="94A3B8"/>
+                </a:solidFill>
+                <a:latin typeface="Malgun Gothic"/>
+              </a:rPr>
+              <a:t>   ·  p.27</a:t>
+            </a:r>
+          </a:p>
+          <a:p>
+            <a:pPr>
+              <a:spcAft>
+                <a:spcPts val="1080"/>
+              </a:spcAft>
+            </a:pPr>
+            <a:r>
+              <a:rPr sz="1100" b="1">
+                <a:solidFill>
+                  <a:srgbClr val="4F46E5"/>
+                </a:solidFill>
+                <a:latin typeface="Malgun Gothic"/>
+              </a:rPr>
+              <a:t>25  </a:t>
+            </a:r>
+            <a:r>
+              <a:rPr sz="1100">
+                <a:solidFill>
+                  <a:srgbClr val="334155"/>
+                </a:solidFill>
+                <a:latin typeface="Malgun Gothic"/>
+              </a:rPr>
+              <a:t>🇨🇳 Chinese Pronunciation Coa…</a:t>
+            </a:r>
+            <a:r>
+              <a:rPr sz="950">
+                <a:solidFill>
+                  <a:srgbClr val="94A3B8"/>
+                </a:solidFill>
+                <a:latin typeface="Malgun Gothic"/>
+              </a:rPr>
+              <a:t>   ·  p.28</a:t>
+            </a:r>
+          </a:p>
+          <a:p>
+            <a:pPr>
+              <a:spcAft>
+                <a:spcPts val="1080"/>
+              </a:spcAft>
+            </a:pPr>
+            <a:r>
+              <a:rPr sz="1100" b="1">
+                <a:solidFill>
+                  <a:srgbClr val="4F46E5"/>
+                </a:solidFill>
+                <a:latin typeface="Malgun Gothic"/>
+              </a:rPr>
+              <a:t>26  </a:t>
+            </a:r>
+            <a:r>
+              <a:rPr sz="1100">
+                <a:solidFill>
+                  <a:srgbClr val="334155"/>
+                </a:solidFill>
+                <a:latin typeface="Malgun Gothic"/>
+              </a:rPr>
+              <a:t>🤖 AI Coaching After Class</a:t>
+            </a:r>
+            <a:r>
+              <a:rPr sz="950">
+                <a:solidFill>
+                  <a:srgbClr val="94A3B8"/>
+                </a:solidFill>
+                <a:latin typeface="Malgun Gothic"/>
+              </a:rPr>
+              <a:t>   ·  p.29</a:t>
+            </a:r>
+          </a:p>
+          <a:p>
+            <a:pPr>
+              <a:spcAft>
+                <a:spcPts val="1080"/>
+              </a:spcAft>
+            </a:pPr>
+            <a:r>
+              <a:rPr sz="1100" b="1">
+                <a:solidFill>
+                  <a:srgbClr val="4F46E5"/>
+                </a:solidFill>
+                <a:latin typeface="Malgun Gothic"/>
+              </a:rPr>
+              <a:t>27  </a:t>
+            </a:r>
+            <a:r>
+              <a:rPr sz="1100">
+                <a:solidFill>
+                  <a:srgbClr val="334155"/>
+                </a:solidFill>
+                <a:latin typeface="Malgun Gothic"/>
+              </a:rPr>
+              <a:t>Tools by Lesson Stage</a:t>
+            </a:r>
+            <a:r>
+              <a:rPr sz="950">
+                <a:solidFill>
+                  <a:srgbClr val="94A3B8"/>
+                </a:solidFill>
+                <a:latin typeface="Malgun Gothic"/>
+              </a:rPr>
+              <a:t>   ·  p.30</a:t>
+            </a:r>
+          </a:p>
+          <a:p>
+            <a:pPr>
+              <a:spcAft>
+                <a:spcPts val="1080"/>
+              </a:spcAft>
+            </a:pPr>
+            <a:r>
+              <a:rPr sz="1100" b="1">
+                <a:solidFill>
+                  <a:srgbClr val="4F46E5"/>
+                </a:solidFill>
+                <a:latin typeface="Malgun Gothic"/>
+              </a:rPr>
+              <a:t>28  </a:t>
+            </a:r>
+            <a:r>
+              <a:rPr sz="1100">
+                <a:solidFill>
+                  <a:srgbClr val="334155"/>
+                </a:solidFill>
+                <a:latin typeface="Malgun Gothic"/>
+              </a:rPr>
+              <a:t>Data at a Glance</a:t>
+            </a:r>
+            <a:r>
+              <a:rPr sz="950">
+                <a:solidFill>
+                  <a:srgbClr val="94A3B8"/>
+                </a:solidFill>
+                <a:latin typeface="Malgun Gothic"/>
+              </a:rPr>
+              <a:t>   ·  p.31</a:t>
+            </a:r>
+          </a:p>
+          <a:p>
+            <a:pPr>
+              <a:spcAft>
+                <a:spcPts val="1080"/>
+              </a:spcAft>
+            </a:pPr>
+            <a:r>
+              <a:rPr sz="1100" b="1">
+                <a:solidFill>
+                  <a:srgbClr val="4F46E5"/>
+                </a:solidFill>
+                <a:latin typeface="Malgun Gothic"/>
+              </a:rPr>
+              <a:t>29  </a:t>
+            </a:r>
+            <a:r>
+              <a:rPr sz="1100">
+                <a:solidFill>
+                  <a:srgbClr val="334155"/>
+                </a:solidFill>
+                <a:latin typeface="Malgun Gothic"/>
+              </a:rPr>
+              <a:t>Frequently Asked Questions (…</a:t>
+            </a:r>
+            <a:r>
+              <a:rPr sz="950">
+                <a:solidFill>
+                  <a:srgbClr val="94A3B8"/>
+                </a:solidFill>
+                <a:latin typeface="Malgun Gothic"/>
+              </a:rPr>
+              <a:t>   ·  p.32</a:t>
+            </a:r>
+          </a:p>
+          <a:p>
+            <a:pPr>
+              <a:spcAft>
+                <a:spcPts val="1080"/>
+              </a:spcAft>
+            </a:pPr>
+            <a:r>
+              <a:rPr sz="1100" b="1">
+                <a:solidFill>
+                  <a:srgbClr val="4F46E5"/>
+                </a:solidFill>
+                <a:latin typeface="Malgun Gothic"/>
+              </a:rPr>
+              <a:t>30  </a:t>
+            </a:r>
+            <a:r>
+              <a:rPr sz="1100">
+                <a:solidFill>
+                  <a:srgbClr val="334155"/>
+                </a:solidFill>
+                <a:latin typeface="Malgun Gothic"/>
+              </a:rPr>
+              <a:t>Lesson Checklist</a:t>
+            </a:r>
+            <a:r>
+              <a:rPr sz="950">
+                <a:solidFill>
+                  <a:srgbClr val="94A3B8"/>
+                </a:solidFill>
+                <a:latin typeface="Malgun Gothic"/>
+              </a:rPr>
+              <a:t>   ·  p.33</a:t>
+            </a:r>
+          </a:p>
+          <a:p>
+            <a:pPr>
+              <a:spcAft>
+                <a:spcPts val="1080"/>
+              </a:spcAft>
+            </a:pPr>
+            <a:r>
+              <a:rPr sz="1100" b="1">
+                <a:solidFill>
+                  <a:srgbClr val="4F46E5"/>
+                </a:solidFill>
+                <a:latin typeface="Malgun Gothic"/>
+              </a:rPr>
+              <a:t>31  </a:t>
+            </a:r>
+            <a:r>
+              <a:rPr sz="1100">
+                <a:solidFill>
+                  <a:srgbClr val="334155"/>
+                </a:solidFill>
+                <a:latin typeface="Malgun Gothic"/>
+              </a:rPr>
+              <a:t>Conclusion · A Practical Gui…</a:t>
+            </a:r>
+            <a:r>
+              <a:rPr sz="950">
+                <a:solidFill>
+                  <a:srgbClr val="94A3B8"/>
+                </a:solidFill>
+                <a:latin typeface="Malgun Gothic"/>
+              </a:rPr>
+              <a:t>   ·  p.34</a:t>
             </a:r>
           </a:p>
         </p:txBody>
